--- a/services/web-app/resources/thesis-essay-decks/lesson-5-body-paragraphs.pptx
+++ b/services/web-app/resources/thesis-essay-decks/lesson-5-body-paragraphs.pptx
@@ -3334,7 +3334,7 @@
       </p:sp>
       <p:pic>
         <p:nvPicPr>
-          <p:cNvPr id="7" name="Image 0" descr="/home/user/yawp/services/web-app/scripts/thesis-essay-decks/assets/icons/lightbulb.png">    </p:cNvPr>
+          <p:cNvPr id="7" name="Image 0" descr="lightbulb icon">    </p:cNvPr>
           <p:cNvPicPr>
             <a:picLocks noChangeAspect="1"/>
           </p:cNvPicPr>
@@ -3383,7 +3383,7 @@
       </p:sp>
       <p:pic>
         <p:nvPicPr>
-          <p:cNvPr id="9" name="Image 1" descr="/home/user/yawp/services/web-app/scripts/thesis-essay-decks/assets/icons/puzzle.png">    </p:cNvPr>
+          <p:cNvPr id="9" name="Image 1" descr="puzzle icon">    </p:cNvPr>
           <p:cNvPicPr>
             <a:picLocks noChangeAspect="1"/>
           </p:cNvPicPr>
@@ -3432,7 +3432,7 @@
       </p:sp>
       <p:pic>
         <p:nvPicPr>
-          <p:cNvPr id="11" name="Image 2" descr="/home/user/yawp/services/web-app/scripts/thesis-essay-decks/assets/icons/thumbs.png">    </p:cNvPr>
+          <p:cNvPr id="11" name="Image 2" descr="thumbs icon">    </p:cNvPr>
           <p:cNvPicPr>
             <a:picLocks noChangeAspect="1"/>
           </p:cNvPicPr>
@@ -4002,7 +4002,7 @@
       </p:sp>
       <p:pic>
         <p:nvPicPr>
-          <p:cNvPr id="5" name="Image 0" descr="/home/user/yawp/services/web-app/scripts/thesis-essay-decks/assets/icons/question.png">    </p:cNvPr>
+          <p:cNvPr id="5" name="Image 0" descr="question icon">    </p:cNvPr>
           <p:cNvPicPr>
             <a:picLocks noChangeAspect="1"/>
           </p:cNvPicPr>
@@ -4723,7 +4723,7 @@
       </p:sp>
       <p:pic>
         <p:nvPicPr>
-          <p:cNvPr id="5" name="Image 0" descr="/home/user/yawp/services/web-app/scripts/thesis-essay-decks/assets/icons/question.png">    </p:cNvPr>
+          <p:cNvPr id="5" name="Image 0" descr="question icon">    </p:cNvPr>
           <p:cNvPicPr>
             <a:picLocks noChangeAspect="1"/>
           </p:cNvPicPr>
@@ -5456,7 +5456,7 @@
       </p:sp>
       <p:pic>
         <p:nvPicPr>
-          <p:cNvPr id="5" name="Image 0" descr="/home/user/yawp/services/web-app/scripts/thesis-essay-decks/assets/critical-essay-form.png">    </p:cNvPr>
+          <p:cNvPr id="5" name="Image 0" descr="The critical essay form: introduction, body paragraphs and conclusion.">    </p:cNvPr>
           <p:cNvPicPr>
             <a:picLocks noChangeAspect="1"/>
           </p:cNvPicPr>
@@ -5669,9 +5669,6 @@
               </a:rPr>
               <a:t>Body paragraphs</a:t>
             </a:r>
-            <a:pPr indent="0" marL="0">
-              <a:buNone/>
-            </a:pPr>
             <a:r>
               <a:rPr lang="en-US" sz="2400" dirty="0">
                 <a:solidFill>
@@ -6010,7 +6007,7 @@
       </p:sp>
       <p:pic>
         <p:nvPicPr>
-          <p:cNvPr id="7" name="Image 0" descr="/home/user/yawp/services/web-app/scripts/thesis-essay-decks/assets/icons/lightbulb.png">    </p:cNvPr>
+          <p:cNvPr id="7" name="Image 0" descr="lightbulb icon">    </p:cNvPr>
           <p:cNvPicPr>
             <a:picLocks noChangeAspect="1"/>
           </p:cNvPicPr>
@@ -6059,7 +6056,7 @@
       </p:sp>
       <p:pic>
         <p:nvPicPr>
-          <p:cNvPr id="9" name="Image 1" descr="/home/user/yawp/services/web-app/scripts/thesis-essay-decks/assets/icons/puzzle.png">    </p:cNvPr>
+          <p:cNvPr id="9" name="Image 1" descr="puzzle icon">    </p:cNvPr>
           <p:cNvPicPr>
             <a:picLocks noChangeAspect="1"/>
           </p:cNvPicPr>
@@ -6108,7 +6105,7 @@
       </p:sp>
       <p:pic>
         <p:nvPicPr>
-          <p:cNvPr id="11" name="Image 2" descr="/home/user/yawp/services/web-app/scripts/thesis-essay-decks/assets/icons/thumbs.png">    </p:cNvPr>
+          <p:cNvPr id="11" name="Image 2" descr="thumbs icon">    </p:cNvPr>
           <p:cNvPicPr>
             <a:picLocks noChangeAspect="1"/>
           </p:cNvPicPr>
@@ -6483,7 +6480,7 @@
       </p:sp>
       <p:pic>
         <p:nvPicPr>
-          <p:cNvPr id="5" name="Image 0" descr="/home/user/yawp/services/web-app/scripts/thesis-essay-decks/assets/icons/puzzle.png">    </p:cNvPr>
+          <p:cNvPr id="5" name="Image 0" descr="puzzle icon">    </p:cNvPr>
           <p:cNvPicPr>
             <a:picLocks noChangeAspect="1"/>
           </p:cNvPicPr>
@@ -6593,12 +6590,6 @@
               </a:rPr>
               <a:t>Once you’ve dropped your thesis at the end of your introduction, everything you write must in some way </a:t>
             </a:r>
-            <a:pPr indent="0" marL="0">
-              <a:lnSpc>
-                <a:spcPct val="115000"/>
-              </a:lnSpc>
-              <a:buNone/>
-            </a:pPr>
             <a:r>
               <a:rPr lang="en-US" sz="3200" dirty="0">
                 <a:solidFill>
@@ -6613,12 +6604,6 @@
               </a:rPr>
               <a:t>support, define, or illustrate</a:t>
             </a:r>
-            <a:pPr indent="0" marL="0">
-              <a:lnSpc>
-                <a:spcPct val="115000"/>
-              </a:lnSpc>
-              <a:buNone/>
-            </a:pPr>
             <a:r>
               <a:rPr lang="en-US" sz="3200" dirty="0">
                 <a:solidFill>
@@ -6812,7 +6797,7 @@
       </p:sp>
       <p:pic>
         <p:nvPicPr>
-          <p:cNvPr id="5" name="Image 0" descr="/home/user/yawp/services/web-app/scripts/thesis-essay-decks/assets/icons/lightbulb.png">    </p:cNvPr>
+          <p:cNvPr id="5" name="Image 0" descr="lightbulb icon">    </p:cNvPr>
           <p:cNvPicPr>
             <a:picLocks noChangeAspect="1"/>
           </p:cNvPicPr>
@@ -6922,12 +6907,6 @@
               </a:rPr>
               <a:t>The good news is that your thesis statement tells you </a:t>
             </a:r>
-            <a:pPr indent="0" marL="0">
-              <a:lnSpc>
-                <a:spcPct val="115000"/>
-              </a:lnSpc>
-              <a:buNone/>
-            </a:pPr>
             <a:r>
               <a:rPr lang="en-US" sz="4000" dirty="0">
                 <a:solidFill>
@@ -7563,12 +7542,6 @@
               </a:rPr>
               <a:t>When </a:t>
             </a:r>
-            <a:pPr indent="0" marL="0">
-              <a:lnSpc>
-                <a:spcPct val="110000"/>
-              </a:lnSpc>
-              <a:buNone/>
-            </a:pPr>
             <a:r>
               <a:rPr lang="en-US" sz="2200" b="1" dirty="0">
                 <a:solidFill>
@@ -7580,12 +7553,6 @@
               </a:rPr>
               <a:t>schools fail to prioritize creativity in teaching</a:t>
             </a:r>
-            <a:pPr indent="0" marL="0">
-              <a:lnSpc>
-                <a:spcPct val="110000"/>
-              </a:lnSpc>
-              <a:buNone/>
-            </a:pPr>
             <a:r>
               <a:rPr lang="en-US" sz="2200" dirty="0">
                 <a:solidFill>
@@ -7597,12 +7564,6 @@
               </a:rPr>
               <a:t>, </a:t>
             </a:r>
-            <a:pPr indent="0" marL="0">
-              <a:lnSpc>
-                <a:spcPct val="110000"/>
-              </a:lnSpc>
-              <a:buNone/>
-            </a:pPr>
             <a:r>
               <a:rPr lang="en-US" sz="2200" b="1" dirty="0">
                 <a:solidFill>
@@ -7614,12 +7575,6 @@
               </a:rPr>
               <a:t>school becomes boring for both students and teachers</a:t>
             </a:r>
-            <a:pPr indent="0" marL="0">
-              <a:lnSpc>
-                <a:spcPct val="110000"/>
-              </a:lnSpc>
-              <a:buNone/>
-            </a:pPr>
             <a:r>
               <a:rPr lang="en-US" sz="2200" dirty="0">
                 <a:solidFill>
@@ -7631,12 +7586,6 @@
               </a:rPr>
               <a:t>, resulting in </a:t>
             </a:r>
-            <a:pPr indent="0" marL="0">
-              <a:lnSpc>
-                <a:spcPct val="110000"/>
-              </a:lnSpc>
-              <a:buNone/>
-            </a:pPr>
             <a:r>
               <a:rPr lang="en-US" sz="2200" b="1" dirty="0">
                 <a:solidFill>
@@ -7648,12 +7597,6 @@
               </a:rPr>
               <a:t>a lack of shared motivation, excitement, and accomplishment</a:t>
             </a:r>
-            <a:pPr indent="0" marL="0">
-              <a:lnSpc>
-                <a:spcPct val="110000"/>
-              </a:lnSpc>
-              <a:buNone/>
-            </a:pPr>
             <a:r>
               <a:rPr lang="en-US" sz="2200" dirty="0">
                 <a:solidFill>
@@ -7768,9 +7711,6 @@
               </a:rPr>
               <a:t>1st element: </a:t>
             </a:r>
-            <a:pPr indent="0" marL="0">
-              <a:buNone/>
-            </a:pPr>
             <a:r>
               <a:rPr lang="en-US" sz="2200" dirty="0">
                 <a:solidFill>
@@ -7885,9 +7825,6 @@
               </a:rPr>
               <a:t>2nd element: </a:t>
             </a:r>
-            <a:pPr indent="0" marL="0">
-              <a:buNone/>
-            </a:pPr>
             <a:r>
               <a:rPr lang="en-US" sz="2200" dirty="0">
                 <a:solidFill>
@@ -8002,9 +7939,6 @@
               </a:rPr>
               <a:t>3rd element: </a:t>
             </a:r>
-            <a:pPr indent="0" marL="0">
-              <a:buNone/>
-            </a:pPr>
             <a:r>
               <a:rPr lang="en-US" sz="2200" dirty="0">
                 <a:solidFill>
@@ -8307,12 +8241,6 @@
               </a:rPr>
               <a:t>When </a:t>
             </a:r>
-            <a:pPr indent="0" marL="0">
-              <a:lnSpc>
-                <a:spcPct val="110000"/>
-              </a:lnSpc>
-              <a:buNone/>
-            </a:pPr>
             <a:r>
               <a:rPr lang="en-US" sz="2200" b="1" dirty="0">
                 <a:solidFill>
@@ -8324,12 +8252,6 @@
               </a:rPr>
               <a:t>schools fail to prioritize creativity in teaching</a:t>
             </a:r>
-            <a:pPr indent="0" marL="0">
-              <a:lnSpc>
-                <a:spcPct val="110000"/>
-              </a:lnSpc>
-              <a:buNone/>
-            </a:pPr>
             <a:r>
               <a:rPr lang="en-US" sz="2200" dirty="0">
                 <a:solidFill>
@@ -8341,12 +8263,6 @@
               </a:rPr>
               <a:t>, </a:t>
             </a:r>
-            <a:pPr indent="0" marL="0">
-              <a:lnSpc>
-                <a:spcPct val="110000"/>
-              </a:lnSpc>
-              <a:buNone/>
-            </a:pPr>
             <a:r>
               <a:rPr lang="en-US" sz="2200" b="1" dirty="0">
                 <a:solidFill>
@@ -8358,12 +8274,6 @@
               </a:rPr>
               <a:t>school becomes boring for both students and teachers</a:t>
             </a:r>
-            <a:pPr indent="0" marL="0">
-              <a:lnSpc>
-                <a:spcPct val="110000"/>
-              </a:lnSpc>
-              <a:buNone/>
-            </a:pPr>
             <a:r>
               <a:rPr lang="en-US" sz="2200" dirty="0">
                 <a:solidFill>
@@ -8375,12 +8285,6 @@
               </a:rPr>
               <a:t>, resulting in </a:t>
             </a:r>
-            <a:pPr indent="0" marL="0">
-              <a:lnSpc>
-                <a:spcPct val="110000"/>
-              </a:lnSpc>
-              <a:buNone/>
-            </a:pPr>
             <a:r>
               <a:rPr lang="en-US" sz="2200" b="1" dirty="0">
                 <a:solidFill>
@@ -8392,12 +8296,6 @@
               </a:rPr>
               <a:t>a lack of shared motivation, excitement, and accomplishment</a:t>
             </a:r>
-            <a:pPr indent="0" marL="0">
-              <a:lnSpc>
-                <a:spcPct val="110000"/>
-              </a:lnSpc>
-              <a:buNone/>
-            </a:pPr>
             <a:r>
               <a:rPr lang="en-US" sz="2200" dirty="0">
                 <a:solidFill>
@@ -8512,9 +8410,6 @@
               </a:rPr>
               <a:t>Body paragraph 1: </a:t>
             </a:r>
-            <a:pPr indent="0" marL="0">
-              <a:buNone/>
-            </a:pPr>
             <a:r>
               <a:rPr lang="en-US" sz="2200" dirty="0">
                 <a:solidFill>
@@ -8629,9 +8524,6 @@
               </a:rPr>
               <a:t>Body paragraph 2: </a:t>
             </a:r>
-            <a:pPr indent="0" marL="0">
-              <a:buNone/>
-            </a:pPr>
             <a:r>
               <a:rPr lang="en-US" sz="2200" dirty="0">
                 <a:solidFill>
@@ -8746,9 +8638,6 @@
               </a:rPr>
               <a:t>Body paragraph 3: </a:t>
             </a:r>
-            <a:pPr indent="0" marL="0">
-              <a:buNone/>
-            </a:pPr>
             <a:r>
               <a:rPr lang="en-US" sz="2200" dirty="0">
                 <a:solidFill>
@@ -8942,7 +8831,7 @@
       </p:sp>
       <p:pic>
         <p:nvPicPr>
-          <p:cNvPr id="5" name="Image 0" descr="/home/user/yawp/services/web-app/scripts/thesis-essay-decks/assets/icons/pencil.png">    </p:cNvPr>
+          <p:cNvPr id="5" name="Image 0" descr="pencil icon">    </p:cNvPr>
           <p:cNvPicPr>
             <a:picLocks noChangeAspect="1"/>
           </p:cNvPicPr>
@@ -9175,9 +9064,6 @@
               </a:rPr>
               <a:t>Transition sentence</a:t>
             </a:r>
-            <a:pPr indent="0" marL="0">
-              <a:buNone/>
-            </a:pPr>
             <a:r>
               <a:rPr lang="en-US" sz="1800" dirty="0">
                 <a:solidFill>
@@ -9354,9 +9240,6 @@
               </a:rPr>
               <a:t>Topic sentence:</a:t>
             </a:r>
-            <a:pPr indent="0" marL="0">
-              <a:buNone/>
-            </a:pPr>
             <a:r>
               <a:rPr lang="en-US" sz="1800" dirty="0">
                 <a:solidFill>
@@ -9533,9 +9416,6 @@
               </a:rPr>
               <a:t>Supporting sentences:</a:t>
             </a:r>
-            <a:pPr indent="0" marL="0">
-              <a:buNone/>
-            </a:pPr>
             <a:r>
               <a:rPr lang="en-US" sz="1800" dirty="0">
                 <a:solidFill>
@@ -9712,9 +9592,6 @@
               </a:rPr>
               <a:t>Concluding sentence:</a:t>
             </a:r>
-            <a:pPr indent="0" marL="0">
-              <a:buNone/>
-            </a:pPr>
             <a:r>
               <a:rPr lang="en-US" sz="1800" dirty="0">
                 <a:solidFill>
@@ -9908,7 +9785,7 @@
       </p:sp>
       <p:pic>
         <p:nvPicPr>
-          <p:cNvPr id="5" name="Image 0" descr="/home/user/yawp/services/web-app/scripts/thesis-essay-decks/assets/icons/question.png">    </p:cNvPr>
+          <p:cNvPr id="5" name="Image 0" descr="question icon">    </p:cNvPr>
           <p:cNvPicPr>
             <a:picLocks noChangeAspect="1"/>
           </p:cNvPicPr>
@@ -10813,7 +10690,7 @@
       </p:sp>
       <p:pic>
         <p:nvPicPr>
-          <p:cNvPr id="7" name="Image 0" descr="/home/user/yawp/services/web-app/scripts/thesis-essay-decks/assets/icons/lightbulb.png">    </p:cNvPr>
+          <p:cNvPr id="7" name="Image 0" descr="lightbulb icon">    </p:cNvPr>
           <p:cNvPicPr>
             <a:picLocks noChangeAspect="1"/>
           </p:cNvPicPr>
@@ -10862,7 +10739,7 @@
       </p:sp>
       <p:pic>
         <p:nvPicPr>
-          <p:cNvPr id="9" name="Image 1" descr="/home/user/yawp/services/web-app/scripts/thesis-essay-decks/assets/icons/puzzle.png">    </p:cNvPr>
+          <p:cNvPr id="9" name="Image 1" descr="puzzle icon">    </p:cNvPr>
           <p:cNvPicPr>
             <a:picLocks noChangeAspect="1"/>
           </p:cNvPicPr>
@@ -10911,7 +10788,7 @@
       </p:sp>
       <p:pic>
         <p:nvPicPr>
-          <p:cNvPr id="11" name="Image 2" descr="/home/user/yawp/services/web-app/scripts/thesis-essay-decks/assets/icons/thumbs.png">    </p:cNvPr>
+          <p:cNvPr id="11" name="Image 2" descr="thumbs icon">    </p:cNvPr>
           <p:cNvPicPr>
             <a:picLocks noChangeAspect="1"/>
           </p:cNvPicPr>
@@ -11395,12 +11272,6 @@
               </a:rPr>
               <a:t>Do you remember trying to learn how to ride a bike? It was exciting, blood rushing, and challenging, but worth it. When you got going but fell, you got back up and went a little further each time. You had more motivation to keep going because it was exciting. Schools today seem to lack this sense of excitement. Students have zero motivation to keep going because there is no excitement from the teachers and no sense of an end goal for the students. Shouldn't the process of learning be inspiring and exciting for everyone? </a:t>
             </a:r>
-            <a:pPr indent="0" marL="0">
-              <a:lnSpc>
-                <a:spcPct val="120000"/>
-              </a:lnSpc>
-              <a:buNone/>
-            </a:pPr>
             <a:r>
               <a:rPr lang="en-US" sz="1350" i="1" dirty="0">
                 <a:solidFill>
@@ -11412,12 +11283,6 @@
               </a:rPr>
               <a:t>When schools fail to prioritize creativity in teaching, school becomes boring for both students and teachers, resulting in a lack of shared motivation, excitement, and accomplishment.</a:t>
             </a:r>
-            <a:pPr indent="0" marL="0">
-              <a:lnSpc>
-                <a:spcPct val="120000"/>
-              </a:lnSpc>
-              <a:buNone/>
-            </a:pPr>
             <a:r>
               <a:rPr lang="en-US" sz="1350" dirty="0">
                 <a:solidFill>
@@ -11430,12 +11295,6 @@
               <a:t>
 </a:t>
             </a:r>
-            <a:pPr indent="0" marL="0">
-              <a:lnSpc>
-                <a:spcPct val="120000"/>
-              </a:lnSpc>
-              <a:buNone/>
-            </a:pPr>
             <a:r>
               <a:rPr lang="en-US" sz="1350" dirty="0">
                 <a:solidFill>
@@ -11450,12 +11309,6 @@
               </a:rPr>
               <a:t>Visit most schools in America today and you’ll see how much creativity they really lack.</a:t>
             </a:r>
-            <a:pPr indent="0" marL="0">
-              <a:lnSpc>
-                <a:spcPct val="120000"/>
-              </a:lnSpc>
-              <a:buNone/>
-            </a:pPr>
             <a:r>
               <a:rPr lang="en-US" sz="1350" dirty="0">
                 <a:solidFill>
@@ -11761,12 +11614,6 @@
               </a:rPr>
               <a:t>The fact is, when students are not inspired creatively, they get bored.</a:t>
             </a:r>
-            <a:pPr indent="0" marL="0">
-              <a:lnSpc>
-                <a:spcPct val="120000"/>
-              </a:lnSpc>
-              <a:buNone/>
-            </a:pPr>
             <a:r>
               <a:rPr lang="en-US" sz="1500" dirty="0">
                 <a:solidFill>
@@ -12072,12 +11919,6 @@
               </a:rPr>
               <a:t>The issue at hand is the lack of shared motivation, excitement, and accomplishment among the teachers and students.</a:t>
             </a:r>
-            <a:pPr indent="0" marL="0">
-              <a:lnSpc>
-                <a:spcPct val="120000"/>
-              </a:lnSpc>
-              <a:buNone/>
-            </a:pPr>
             <a:r>
               <a:rPr lang="en-US" sz="1500" dirty="0">
                 <a:solidFill>
@@ -12280,7 +12121,7 @@
       </p:sp>
       <p:pic>
         <p:nvPicPr>
-          <p:cNvPr id="5" name="Image 0" descr="/home/user/yawp/services/web-app/scripts/thesis-essay-decks/assets/yawp-editor-body.png">    </p:cNvPr>
+          <p:cNvPr id="5" name="Image 0" descr="The YAWP! editor on the Body Paragraphs step.">    </p:cNvPr>
           <p:cNvPicPr>
             <a:picLocks noChangeAspect="1"/>
           </p:cNvPicPr>
@@ -12362,9 +12203,6 @@
               </a:rPr>
               <a:t>The Tutor says </a:t>
             </a:r>
-            <a:pPr indent="0" marL="0">
-              <a:buNone/>
-            </a:pPr>
             <a:r>
               <a:rPr lang="en-US" sz="2000" dirty="0">
                 <a:solidFill>
@@ -12753,7 +12591,7 @@
       </p:sp>
       <p:pic>
         <p:nvPicPr>
-          <p:cNvPr id="5" name="Image 0" descr="/home/user/yawp/services/web-app/scripts/thesis-essay-decks/assets/icons/pencil.png">    </p:cNvPr>
+          <p:cNvPr id="5" name="Image 0" descr="pencil icon">    </p:cNvPr>
           <p:cNvPicPr>
             <a:picLocks noChangeAspect="1"/>
           </p:cNvPicPr>
@@ -12986,9 +12824,6 @@
               </a:rPr>
               <a:t>The neighborhood</a:t>
             </a:r>
-            <a:pPr indent="0" marL="0">
-              <a:buNone/>
-            </a:pPr>
             <a:r>
               <a:rPr lang="en-US" sz="2000" dirty="0">
                 <a:solidFill>
@@ -13165,9 +13000,6 @@
               </a:rPr>
               <a:t>The front door</a:t>
             </a:r>
-            <a:pPr indent="0" marL="0">
-              <a:buNone/>
-            </a:pPr>
             <a:r>
               <a:rPr lang="en-US" sz="2000" dirty="0">
                 <a:solidFill>
@@ -13344,9 +13176,6 @@
               </a:rPr>
               <a:t>The rooms</a:t>
             </a:r>
-            <a:pPr indent="0" marL="0">
-              <a:buNone/>
-            </a:pPr>
             <a:r>
               <a:rPr lang="en-US" sz="2000" dirty="0">
                 <a:solidFill>
@@ -13523,9 +13352,6 @@
               </a:rPr>
               <a:t>Back at the door</a:t>
             </a:r>
-            <a:pPr indent="0" marL="0">
-              <a:buNone/>
-            </a:pPr>
             <a:r>
               <a:rPr lang="en-US" sz="2000" dirty="0">
                 <a:solidFill>
@@ -13719,7 +13545,7 @@
       </p:sp>
       <p:pic>
         <p:nvPicPr>
-          <p:cNvPr id="5" name="Image 0" descr="/home/user/yawp/services/web-app/scripts/thesis-essay-decks/assets/icons/question.png">    </p:cNvPr>
+          <p:cNvPr id="5" name="Image 0" descr="question icon">    </p:cNvPr>
           <p:cNvPicPr>
             <a:picLocks noChangeAspect="1"/>
           </p:cNvPicPr>
@@ -14546,7 +14372,7 @@
       </p:sp>
       <p:pic>
         <p:nvPicPr>
-          <p:cNvPr id="5" name="Image 0" descr="/home/user/yawp/services/web-app/scripts/thesis-essay-decks/assets/icons/question.png">    </p:cNvPr>
+          <p:cNvPr id="5" name="Image 0" descr="question icon">    </p:cNvPr>
           <p:cNvPicPr>
             <a:picLocks noChangeAspect="1"/>
           </p:cNvPicPr>
@@ -15370,7 +15196,7 @@
       </p:sp>
       <p:pic>
         <p:nvPicPr>
-          <p:cNvPr id="5" name="Image 0" descr="/home/user/yawp/services/web-app/scripts/thesis-essay-decks/assets/icons/question.png">    </p:cNvPr>
+          <p:cNvPr id="5" name="Image 0" descr="question icon">    </p:cNvPr>
           <p:cNvPicPr>
             <a:picLocks noChangeAspect="1"/>
           </p:cNvPicPr>
@@ -16197,7 +16023,7 @@
       </p:sp>
       <p:pic>
         <p:nvPicPr>
-          <p:cNvPr id="5" name="Image 0" descr="/home/user/yawp/services/web-app/scripts/thesis-essay-decks/assets/icons/question.png">    </p:cNvPr>
+          <p:cNvPr id="5" name="Image 0" descr="question icon">    </p:cNvPr>
           <p:cNvPicPr>
             <a:picLocks noChangeAspect="1"/>
           </p:cNvPicPr>
@@ -17021,7 +16847,7 @@
       </p:sp>
       <p:pic>
         <p:nvPicPr>
-          <p:cNvPr id="5" name="Image 0" descr="/home/user/yawp/services/web-app/scripts/thesis-essay-decks/assets/icons/question.png">    </p:cNvPr>
+          <p:cNvPr id="5" name="Image 0" descr="question icon">    </p:cNvPr>
           <p:cNvPicPr>
             <a:picLocks noChangeAspect="1"/>
           </p:cNvPicPr>
@@ -17848,7 +17674,7 @@
       </p:sp>
       <p:pic>
         <p:nvPicPr>
-          <p:cNvPr id="5" name="Image 0" descr="/home/user/yawp/services/web-app/scripts/thesis-essay-decks/assets/icons/question.png">    </p:cNvPr>
+          <p:cNvPr id="5" name="Image 0" descr="question icon">    </p:cNvPr>
           <p:cNvPicPr>
             <a:picLocks noChangeAspect="1"/>
           </p:cNvPicPr>
@@ -18672,7 +18498,7 @@
       </p:sp>
       <p:pic>
         <p:nvPicPr>
-          <p:cNvPr id="5" name="Image 0" descr="/home/user/yawp/services/web-app/scripts/thesis-essay-decks/assets/icons/question.png">    </p:cNvPr>
+          <p:cNvPr id="5" name="Image 0" descr="question icon">    </p:cNvPr>
           <p:cNvPicPr>
             <a:picLocks noChangeAspect="1"/>
           </p:cNvPicPr>

--- a/services/web-app/resources/thesis-essay-decks/lesson-5-body-paragraphs.pptx
+++ b/services/web-app/resources/thesis-essay-decks/lesson-5-body-paragraphs.pptx
@@ -1934,7 +1934,7 @@
           <a:p>
             <a:r>
               <a:rPr lang="en-US" dirty="0"/>
-              <a:t>Today’s YAWP! editor on the Body Paragraphs step. Students start with the first element of their thesis only. Work the room, read paragraphs, encourage; you’ll see confidence rise as the essays take shape. Celebrate it.</a:t>
+              <a:t>Brian’s telling: imagine you’re a real estate agent and the goal is to sell the house. As the buyer drives in they notice the street, the sidewalks, the other houses; that’s the introduction creating context. They walk up the path and into the foyer: the thesis, where they can see the whole argument. You’d never stop there, so you walk them room by room (the body paragraphs), pointing out specific things that make the house worth buying. At the end you walk them back to the front door and point out the neighborhood again, maybe a neighboring house you won’t go into: new ideas you acknowledge without exploring. You place the house in the wider world and make a graceful exit. That’s the conclusion.</a:t>
             </a:r>
             <a:endParaRPr lang="en-US" dirty="0"/>
           </a:p>
@@ -2022,7 +2022,7 @@
           <a:p>
             <a:r>
               <a:rPr lang="en-US" dirty="0"/>
-              <a:t>Brian’s telling: imagine you’re a real estate agent and the goal is to sell the house. As the buyer drives in they notice the street, the sidewalks, the other houses; that’s the introduction creating context. They walk up the path and into the foyer: the thesis, where they can see the whole argument. You’d never stop there, so you walk them room by room (the body paragraphs), pointing out specific things that make the house worth buying. At the end you walk them back to the front door and point out the neighborhood again, maybe a neighboring house you won’t go into: new ideas you acknowledge without exploring. You place the house in the wider world and make a graceful exit. That’s the conclusion.</a:t>
+              <a:t>Today’s YAWP! editor on the Body Paragraphs step. Students start with the first element of their thesis only. Work the room, read paragraphs, encourage; you’ll see confidence rise as the essays take shape. Celebrate it.</a:t>
             </a:r>
             <a:endParaRPr lang="en-US" dirty="0"/>
           </a:p>
@@ -12034,13 +12034,13 @@
             <a:r>
               <a:rPr lang="en-US" sz="1200" b="1" spc="200" kern="0" dirty="0">
                 <a:solidFill>
-                  <a:srgbClr val="FFB600"/>
+                  <a:srgbClr val="FF9755"/>
                 </a:solidFill>
                 <a:latin typeface="Consolas" pitchFamily="34" charset="0"/>
                 <a:ea typeface="Consolas" pitchFamily="34" charset="-122"/>
                 <a:cs typeface="Consolas" pitchFamily="34" charset="-120"/>
               </a:rPr>
-              <a:t>YOUR TURN</a:t>
+              <a:t>THE HOUSE ANALOGY</a:t>
             </a:r>
             <a:endParaRPr lang="en-US" sz="1200" dirty="0"/>
           </a:p>
@@ -12071,7 +12071,7 @@
               <a:buNone/>
             </a:pPr>
             <a:r>
-              <a:rPr lang="en-US" sz="3600" dirty="0">
+              <a:rPr lang="en-US" sz="3000" dirty="0">
                 <a:solidFill>
                   <a:srgbClr val="3C3828"/>
                 </a:solidFill>
@@ -12079,9 +12079,9 @@
                 <a:ea typeface="Georgia" pitchFamily="34" charset="-122"/>
                 <a:cs typeface="Georgia" pitchFamily="34" charset="-120"/>
               </a:rPr>
-              <a:t>What it looks like</a:t>
-            </a:r>
-            <a:endParaRPr lang="en-US" sz="3600" dirty="0"/>
+              <a:t>Your essay is a house, and you’re showing it</a:t>
+            </a:r>
+            <a:endParaRPr lang="en-US" sz="3000" dirty="0"/>
           </a:p>
         </p:txBody>
       </p:sp>
@@ -12093,12 +12093,111 @@
         </p:nvSpPr>
         <p:spPr>
           <a:xfrm>
-            <a:off x="685800" y="1828800"/>
-            <a:ext cx="6949440" cy="4150360"/>
+            <a:off x="10637215" y="457200"/>
+            <a:ext cx="868680" cy="868680"/>
+          </a:xfrm>
+          <a:prstGeom prst="ellipse">
+            <a:avLst/>
+          </a:prstGeom>
+          <a:solidFill>
+            <a:srgbClr val="FF9755"/>
+          </a:solidFill>
+          <a:ln w="12700">
+            <a:solidFill>
+              <a:srgbClr val="FF9755"/>
+            </a:solidFill>
+            <a:prstDash val="solid"/>
+          </a:ln>
+        </p:spPr>
+      </p:sp>
+      <p:pic>
+        <p:nvPicPr>
+          <p:cNvPr id="5" name="Image 0" descr="pencil icon">    </p:cNvPr>
+          <p:cNvPicPr>
+            <a:picLocks noChangeAspect="1"/>
+          </p:cNvPicPr>
+          <p:nvPr/>
+        </p:nvPicPr>
+        <p:blipFill>
+          <a:blip r:embed="rId1"/>
+          <a:stretch>
+            <a:fillRect/>
+          </a:stretch>
+        </p:blipFill>
+        <p:spPr>
+          <a:xfrm>
+            <a:off x="10810951" y="630936"/>
+            <a:ext cx="521208" cy="521208"/>
+          </a:xfrm>
+          <a:prstGeom prst="rect">
+            <a:avLst/>
+          </a:prstGeom>
+        </p:spPr>
+      </p:pic>
+      <p:sp>
+        <p:nvSpPr>
+          <p:cNvPr id="6" name="Shape 3"/>
+          <p:cNvSpPr/>
+          <p:nvPr/>
+        </p:nvSpPr>
+        <p:spPr>
+          <a:xfrm>
+            <a:off x="10344607" y="530352"/>
+            <a:ext cx="182880" cy="182880"/>
+          </a:xfrm>
+          <a:prstGeom prst="ellipse">
+            <a:avLst/>
+          </a:prstGeom>
+          <a:solidFill>
+            <a:srgbClr val="02BDC7"/>
+          </a:solidFill>
+          <a:ln w="12700">
+            <a:solidFill>
+              <a:srgbClr val="02BDC7"/>
+            </a:solidFill>
+            <a:prstDash val="solid"/>
+          </a:ln>
+        </p:spPr>
+      </p:sp>
+      <p:sp>
+        <p:nvSpPr>
+          <p:cNvPr id="7" name="Shape 4"/>
+          <p:cNvSpPr/>
+          <p:nvPr/>
+        </p:nvSpPr>
+        <p:spPr>
+          <a:xfrm>
+            <a:off x="11460175" y="1307592"/>
+            <a:ext cx="128016" cy="128016"/>
+          </a:xfrm>
+          <a:prstGeom prst="ellipse">
+            <a:avLst/>
+          </a:prstGeom>
+          <a:solidFill>
+            <a:srgbClr val="FFB600"/>
+          </a:solidFill>
+          <a:ln w="12700">
+            <a:solidFill>
+              <a:srgbClr val="FFB600"/>
+            </a:solidFill>
+            <a:prstDash val="solid"/>
+          </a:ln>
+        </p:spPr>
+      </p:sp>
+      <p:sp>
+        <p:nvSpPr>
+          <p:cNvPr id="8" name="Shape 5"/>
+          <p:cNvSpPr/>
+          <p:nvPr/>
+        </p:nvSpPr>
+        <p:spPr>
+          <a:xfrm>
+            <a:off x="685800" y="1965960"/>
+            <a:ext cx="5250028" cy="1897380"/>
           </a:xfrm>
           <a:prstGeom prst="roundRect">
             <a:avLst>
-              <a:gd name="adj" fmla="val 3084"/>
+              <a:gd name="adj" fmla="val 6747"/>
             </a:avLst>
           </a:prstGeom>
           <a:solidFill>
@@ -12119,65 +12218,66 @@
           </a:effectLst>
         </p:spPr>
       </p:sp>
-      <p:pic>
-        <p:nvPicPr>
-          <p:cNvPr id="5" name="Image 0" descr="The YAWP! editor on the Body Paragraphs step.">    </p:cNvPr>
-          <p:cNvPicPr>
-            <a:picLocks noChangeAspect="1"/>
-          </p:cNvPicPr>
-          <p:nvPr/>
-        </p:nvPicPr>
-        <p:blipFill>
-          <a:blip r:embed="rId1"/>
-          <a:stretch>
-            <a:fillRect/>
-          </a:stretch>
-        </p:blipFill>
-        <p:spPr>
-          <a:xfrm>
-            <a:off x="813816" y="1956816"/>
-            <a:ext cx="6693408" cy="3894328"/>
-          </a:xfrm>
-          <a:prstGeom prst="rect">
-            <a:avLst/>
-          </a:prstGeom>
-        </p:spPr>
-      </p:pic>
-      <p:sp>
-        <p:nvSpPr>
-          <p:cNvPr id="6" name="Shape 3"/>
-          <p:cNvSpPr/>
-          <p:nvPr/>
-        </p:nvSpPr>
-        <p:spPr>
-          <a:xfrm>
-            <a:off x="8183880" y="2505456"/>
-            <a:ext cx="292608" cy="292608"/>
+      <p:sp>
+        <p:nvSpPr>
+          <p:cNvPr id="9" name="Shape 6"/>
+          <p:cNvSpPr/>
+          <p:nvPr/>
+        </p:nvSpPr>
+        <p:spPr>
+          <a:xfrm>
+            <a:off x="813816" y="1965960"/>
+            <a:ext cx="4993996" cy="91440"/>
+          </a:xfrm>
+          <a:prstGeom prst="rect">
+            <a:avLst/>
+          </a:prstGeom>
+          <a:solidFill>
+            <a:srgbClr val="FF9755"/>
+          </a:solidFill>
+          <a:ln w="12700">
+            <a:solidFill>
+              <a:srgbClr val="FF9755"/>
+            </a:solidFill>
+            <a:prstDash val="solid"/>
+          </a:ln>
+        </p:spPr>
+      </p:sp>
+      <p:sp>
+        <p:nvSpPr>
+          <p:cNvPr id="10" name="Shape 7"/>
+          <p:cNvSpPr/>
+          <p:nvPr/>
+        </p:nvSpPr>
+        <p:spPr>
+          <a:xfrm>
+            <a:off x="960120" y="2286000"/>
+            <a:ext cx="548640" cy="548640"/>
           </a:xfrm>
           <a:prstGeom prst="ellipse">
             <a:avLst/>
           </a:prstGeom>
           <a:solidFill>
-            <a:srgbClr val="FFB600"/>
+            <a:srgbClr val="FF9755"/>
           </a:solidFill>
           <a:ln w="12700">
             <a:solidFill>
-              <a:srgbClr val="FFB600"/>
-            </a:solidFill>
-            <a:prstDash val="solid"/>
-          </a:ln>
-        </p:spPr>
-      </p:sp>
-      <p:sp>
-        <p:nvSpPr>
-          <p:cNvPr id="7" name="Text 4"/>
-          <p:cNvSpPr/>
-          <p:nvPr/>
-        </p:nvSpPr>
-        <p:spPr>
-          <a:xfrm>
-            <a:off x="8659368" y="2194560"/>
-            <a:ext cx="2846527" cy="914400"/>
+              <a:srgbClr val="FF9755"/>
+            </a:solidFill>
+            <a:prstDash val="solid"/>
+          </a:ln>
+        </p:spPr>
+      </p:sp>
+      <p:sp>
+        <p:nvSpPr>
+          <p:cNvPr id="11" name="Text 8"/>
+          <p:cNvSpPr/>
+          <p:nvPr/>
+        </p:nvSpPr>
+        <p:spPr>
+          <a:xfrm>
+            <a:off x="960120" y="2286000"/>
+            <a:ext cx="548640" cy="548640"/>
           </a:xfrm>
           <a:prstGeom prst="rect">
             <a:avLst/>
@@ -12189,20 +12289,48 @@
           <a:bodyPr wrap="square" lIns="0" tIns="0" rIns="0" bIns="0" rtlCol="0" anchor="ctr"/>
           <a:lstStyle/>
           <a:p>
+            <a:pPr algn="ctr" indent="0" marL="0">
+              <a:buNone/>
+            </a:pPr>
+            <a:r>
+              <a:rPr lang="en-US" sz="2200" b="1" dirty="0">
+                <a:solidFill>
+                  <a:srgbClr val="FFFEFA"/>
+                </a:solidFill>
+                <a:latin typeface="Georgia" pitchFamily="34" charset="0"/>
+                <a:ea typeface="Georgia" pitchFamily="34" charset="-122"/>
+                <a:cs typeface="Georgia" pitchFamily="34" charset="-120"/>
+              </a:rPr>
+              <a:t>1</a:t>
+            </a:r>
+            <a:endParaRPr lang="en-US" sz="2200" dirty="0"/>
+          </a:p>
+        </p:txBody>
+      </p:sp>
+      <p:sp>
+        <p:nvSpPr>
+          <p:cNvPr id="12" name="Text 9"/>
+          <p:cNvSpPr/>
+          <p:nvPr/>
+        </p:nvSpPr>
+        <p:spPr>
+          <a:xfrm>
+            <a:off x="1737360" y="2194560"/>
+            <a:ext cx="3924148" cy="1485900"/>
+          </a:xfrm>
+          <a:prstGeom prst="rect">
+            <a:avLst/>
+          </a:prstGeom>
+          <a:noFill/>
+          <a:ln/>
+        </p:spPr>
+        <p:txBody>
+          <a:bodyPr wrap="square" lIns="0" tIns="0" rIns="0" bIns="0" rtlCol="0" anchor="t"/>
+          <a:lstStyle/>
+          <a:p>
             <a:pPr indent="0" marL="0">
               <a:buNone/>
             </a:pPr>
-            <a:r>
-              <a:rPr lang="en-US" sz="2000" dirty="0">
-                <a:solidFill>
-                  <a:srgbClr val="3C3828"/>
-                </a:solidFill>
-                <a:latin typeface="Calibri" pitchFamily="34" charset="0"/>
-                <a:ea typeface="Calibri" pitchFamily="34" charset="-122"/>
-                <a:cs typeface="Calibri" pitchFamily="34" charset="-120"/>
-              </a:rPr>
-              <a:t>The Tutor says </a:t>
-            </a:r>
             <a:r>
               <a:rPr lang="en-US" sz="2000" dirty="0">
                 <a:solidFill>
@@ -12215,61 +12343,8 @@
                 <a:ea typeface="Calibri" pitchFamily="34" charset="-122"/>
                 <a:cs typeface="Calibri" pitchFamily="34" charset="-120"/>
               </a:rPr>
-              <a:t>Body Paragraphs</a:t>
-            </a:r>
-            <a:endParaRPr lang="en-US" sz="2000" dirty="0"/>
-          </a:p>
-        </p:txBody>
-      </p:sp>
-      <p:sp>
-        <p:nvSpPr>
-          <p:cNvPr id="8" name="Shape 5"/>
-          <p:cNvSpPr/>
-          <p:nvPr/>
-        </p:nvSpPr>
-        <p:spPr>
-          <a:xfrm>
-            <a:off x="8183880" y="3419856"/>
-            <a:ext cx="292608" cy="292608"/>
-          </a:xfrm>
-          <a:prstGeom prst="ellipse">
-            <a:avLst/>
-          </a:prstGeom>
-          <a:solidFill>
-            <a:srgbClr val="FC4540"/>
-          </a:solidFill>
-          <a:ln w="12700">
-            <a:solidFill>
-              <a:srgbClr val="FC4540"/>
-            </a:solidFill>
-            <a:prstDash val="solid"/>
-          </a:ln>
-        </p:spPr>
-      </p:sp>
-      <p:sp>
-        <p:nvSpPr>
-          <p:cNvPr id="9" name="Text 6"/>
-          <p:cNvSpPr/>
-          <p:nvPr/>
-        </p:nvSpPr>
-        <p:spPr>
-          <a:xfrm>
-            <a:off x="8659368" y="3108960"/>
-            <a:ext cx="2846527" cy="914400"/>
-          </a:xfrm>
-          <a:prstGeom prst="rect">
-            <a:avLst/>
-          </a:prstGeom>
-          <a:noFill/>
-          <a:ln/>
-        </p:spPr>
-        <p:txBody>
-          <a:bodyPr wrap="square" lIns="0" tIns="0" rIns="0" bIns="0" rtlCol="0" anchor="ctr"/>
-          <a:lstStyle/>
-          <a:p>
-            <a:pPr indent="0" marL="0">
-              <a:buNone/>
-            </a:pPr>
+              <a:t>The neighborhood</a:t>
+            </a:r>
             <a:r>
               <a:rPr lang="en-US" sz="2000" dirty="0">
                 <a:solidFill>
@@ -12279,7 +12354,7 @@
                 <a:ea typeface="Calibri" pitchFamily="34" charset="-122"/>
                 <a:cs typeface="Calibri" pitchFamily="34" charset="-120"/>
               </a:rPr>
-              <a:t>Your thesis, in its parts</a:t>
+              <a:t> · Driving in, your reader gets a sense of where they are. That’s your introduction: context.</a:t>
             </a:r>
             <a:endParaRPr lang="en-US" sz="2000" dirty="0"/>
           </a:p>
@@ -12287,39 +12362,98 @@
       </p:sp>
       <p:sp>
         <p:nvSpPr>
-          <p:cNvPr id="10" name="Shape 7"/>
-          <p:cNvSpPr/>
-          <p:nvPr/>
-        </p:nvSpPr>
-        <p:spPr>
-          <a:xfrm>
-            <a:off x="8183880" y="4334256"/>
-            <a:ext cx="292608" cy="292608"/>
+          <p:cNvPr id="13" name="Shape 10"/>
+          <p:cNvSpPr/>
+          <p:nvPr/>
+        </p:nvSpPr>
+        <p:spPr>
+          <a:xfrm>
+            <a:off x="6255868" y="1965960"/>
+            <a:ext cx="5250028" cy="1897380"/>
+          </a:xfrm>
+          <a:prstGeom prst="roundRect">
+            <a:avLst>
+              <a:gd name="adj" fmla="val 6747"/>
+            </a:avLst>
+          </a:prstGeom>
+          <a:solidFill>
+            <a:srgbClr val="FFFEFA"/>
+          </a:solidFill>
+          <a:ln w="9525">
+            <a:solidFill>
+              <a:srgbClr val="D6D4CC"/>
+            </a:solidFill>
+            <a:prstDash val="solid"/>
+          </a:ln>
+          <a:effectLst>
+            <a:outerShdw sx="100000" sy="100000" kx="0" ky="0" algn="bl" rotWithShape="0" blurRad="127000" dist="38100" dir="5400000">
+              <a:srgbClr val="3C3828">
+                <a:alpha val="12000"/>
+              </a:srgbClr>
+            </a:outerShdw>
+          </a:effectLst>
+        </p:spPr>
+      </p:sp>
+      <p:sp>
+        <p:nvSpPr>
+          <p:cNvPr id="14" name="Shape 11"/>
+          <p:cNvSpPr/>
+          <p:nvPr/>
+        </p:nvSpPr>
+        <p:spPr>
+          <a:xfrm>
+            <a:off x="6383884" y="1965960"/>
+            <a:ext cx="4993996" cy="91440"/>
+          </a:xfrm>
+          <a:prstGeom prst="rect">
+            <a:avLst/>
+          </a:prstGeom>
+          <a:solidFill>
+            <a:srgbClr val="FC4067"/>
+          </a:solidFill>
+          <a:ln w="12700">
+            <a:solidFill>
+              <a:srgbClr val="FC4067"/>
+            </a:solidFill>
+            <a:prstDash val="solid"/>
+          </a:ln>
+        </p:spPr>
+      </p:sp>
+      <p:sp>
+        <p:nvSpPr>
+          <p:cNvPr id="15" name="Shape 12"/>
+          <p:cNvSpPr/>
+          <p:nvPr/>
+        </p:nvSpPr>
+        <p:spPr>
+          <a:xfrm>
+            <a:off x="6530188" y="2286000"/>
+            <a:ext cx="548640" cy="548640"/>
           </a:xfrm>
           <a:prstGeom prst="ellipse">
             <a:avLst/>
           </a:prstGeom>
           <a:solidFill>
-            <a:srgbClr val="FF9755"/>
+            <a:srgbClr val="FC4067"/>
           </a:solidFill>
           <a:ln w="12700">
             <a:solidFill>
-              <a:srgbClr val="FF9755"/>
-            </a:solidFill>
-            <a:prstDash val="solid"/>
-          </a:ln>
-        </p:spPr>
-      </p:sp>
-      <p:sp>
-        <p:nvSpPr>
-          <p:cNvPr id="11" name="Text 8"/>
-          <p:cNvSpPr/>
-          <p:nvPr/>
-        </p:nvSpPr>
-        <p:spPr>
-          <a:xfrm>
-            <a:off x="8659368" y="4023360"/>
-            <a:ext cx="2846527" cy="914400"/>
+              <a:srgbClr val="FC4067"/>
+            </a:solidFill>
+            <a:prstDash val="solid"/>
+          </a:ln>
+        </p:spPr>
+      </p:sp>
+      <p:sp>
+        <p:nvSpPr>
+          <p:cNvPr id="16" name="Text 13"/>
+          <p:cNvSpPr/>
+          <p:nvPr/>
+        </p:nvSpPr>
+        <p:spPr>
+          <a:xfrm>
+            <a:off x="6530188" y="2286000"/>
+            <a:ext cx="548640" cy="548640"/>
           </a:xfrm>
           <a:prstGeom prst="rect">
             <a:avLst/>
@@ -12331,6 +12465,45 @@
           <a:bodyPr wrap="square" lIns="0" tIns="0" rIns="0" bIns="0" rtlCol="0" anchor="ctr"/>
           <a:lstStyle/>
           <a:p>
+            <a:pPr algn="ctr" indent="0" marL="0">
+              <a:buNone/>
+            </a:pPr>
+            <a:r>
+              <a:rPr lang="en-US" sz="2200" b="1" dirty="0">
+                <a:solidFill>
+                  <a:srgbClr val="FFFEFA"/>
+                </a:solidFill>
+                <a:latin typeface="Georgia" pitchFamily="34" charset="0"/>
+                <a:ea typeface="Georgia" pitchFamily="34" charset="-122"/>
+                <a:cs typeface="Georgia" pitchFamily="34" charset="-120"/>
+              </a:rPr>
+              <a:t>2</a:t>
+            </a:r>
+            <a:endParaRPr lang="en-US" sz="2200" dirty="0"/>
+          </a:p>
+        </p:txBody>
+      </p:sp>
+      <p:sp>
+        <p:nvSpPr>
+          <p:cNvPr id="17" name="Text 14"/>
+          <p:cNvSpPr/>
+          <p:nvPr/>
+        </p:nvSpPr>
+        <p:spPr>
+          <a:xfrm>
+            <a:off x="7307428" y="2194560"/>
+            <a:ext cx="3924148" cy="1485900"/>
+          </a:xfrm>
+          <a:prstGeom prst="rect">
+            <a:avLst/>
+          </a:prstGeom>
+          <a:noFill/>
+          <a:ln/>
+        </p:spPr>
+        <p:txBody>
+          <a:bodyPr wrap="square" lIns="0" tIns="0" rIns="0" bIns="0" rtlCol="0" anchor="t"/>
+          <a:lstStyle/>
+          <a:p>
             <a:pPr indent="0" marL="0">
               <a:buNone/>
             </a:pPr>
@@ -12339,65 +12512,15 @@
                 <a:solidFill>
                   <a:srgbClr val="3C3828"/>
                 </a:solidFill>
+                <a:highlight>
+                  <a:srgbClr val="FFE14D"/>
+                </a:highlight>
                 <a:latin typeface="Calibri" pitchFamily="34" charset="0"/>
                 <a:ea typeface="Calibri" pitchFamily="34" charset="-122"/>
                 <a:cs typeface="Calibri" pitchFamily="34" charset="-120"/>
               </a:rPr>
-              <a:t>One paragraph per part</a:t>
-            </a:r>
-            <a:endParaRPr lang="en-US" sz="2000" dirty="0"/>
-          </a:p>
-        </p:txBody>
-      </p:sp>
-      <p:sp>
-        <p:nvSpPr>
-          <p:cNvPr id="12" name="Shape 9"/>
-          <p:cNvSpPr/>
-          <p:nvPr/>
-        </p:nvSpPr>
-        <p:spPr>
-          <a:xfrm>
-            <a:off x="8183880" y="5248656"/>
-            <a:ext cx="292608" cy="292608"/>
-          </a:xfrm>
-          <a:prstGeom prst="ellipse">
-            <a:avLst/>
-          </a:prstGeom>
-          <a:solidFill>
-            <a:srgbClr val="FC4067"/>
-          </a:solidFill>
-          <a:ln w="12700">
-            <a:solidFill>
-              <a:srgbClr val="FC4067"/>
-            </a:solidFill>
-            <a:prstDash val="solid"/>
-          </a:ln>
-        </p:spPr>
-      </p:sp>
-      <p:sp>
-        <p:nvSpPr>
-          <p:cNvPr id="13" name="Text 10"/>
-          <p:cNvSpPr/>
-          <p:nvPr/>
-        </p:nvSpPr>
-        <p:spPr>
-          <a:xfrm>
-            <a:off x="8659368" y="4937760"/>
-            <a:ext cx="2846527" cy="914400"/>
-          </a:xfrm>
-          <a:prstGeom prst="rect">
-            <a:avLst/>
-          </a:prstGeom>
-          <a:noFill/>
-          <a:ln/>
-        </p:spPr>
-        <p:txBody>
-          <a:bodyPr wrap="square" lIns="0" tIns="0" rIns="0" bIns="0" rtlCol="0" anchor="ctr"/>
-          <a:lstStyle/>
-          <a:p>
-            <a:pPr indent="0" marL="0">
-              <a:buNone/>
-            </a:pPr>
+              <a:t>The front door</a:t>
+            </a:r>
             <a:r>
               <a:rPr lang="en-US" sz="2000" dirty="0">
                 <a:solidFill>
@@ -12407,7 +12530,359 @@
                 <a:ea typeface="Calibri" pitchFamily="34" charset="-122"/>
                 <a:cs typeface="Calibri" pitchFamily="34" charset="-120"/>
               </a:rPr>
-              <a:t>Written one? Ask the Tutor for feedback</a:t>
+              <a:t> · They step into the foyer and see the whole house at once. That’s your thesis statement.</a:t>
+            </a:r>
+            <a:endParaRPr lang="en-US" sz="2000" dirty="0"/>
+          </a:p>
+        </p:txBody>
+      </p:sp>
+      <p:sp>
+        <p:nvSpPr>
+          <p:cNvPr id="18" name="Shape 15"/>
+          <p:cNvSpPr/>
+          <p:nvPr/>
+        </p:nvSpPr>
+        <p:spPr>
+          <a:xfrm>
+            <a:off x="685800" y="4183380"/>
+            <a:ext cx="5250028" cy="1897380"/>
+          </a:xfrm>
+          <a:prstGeom prst="roundRect">
+            <a:avLst>
+              <a:gd name="adj" fmla="val 6747"/>
+            </a:avLst>
+          </a:prstGeom>
+          <a:solidFill>
+            <a:srgbClr val="FFFEFA"/>
+          </a:solidFill>
+          <a:ln w="9525">
+            <a:solidFill>
+              <a:srgbClr val="D6D4CC"/>
+            </a:solidFill>
+            <a:prstDash val="solid"/>
+          </a:ln>
+          <a:effectLst>
+            <a:outerShdw sx="100000" sy="100000" kx="0" ky="0" algn="bl" rotWithShape="0" blurRad="127000" dist="38100" dir="5400000">
+              <a:srgbClr val="3C3828">
+                <a:alpha val="12000"/>
+              </a:srgbClr>
+            </a:outerShdw>
+          </a:effectLst>
+        </p:spPr>
+      </p:sp>
+      <p:sp>
+        <p:nvSpPr>
+          <p:cNvPr id="19" name="Shape 16"/>
+          <p:cNvSpPr/>
+          <p:nvPr/>
+        </p:nvSpPr>
+        <p:spPr>
+          <a:xfrm>
+            <a:off x="813816" y="4183380"/>
+            <a:ext cx="4993996" cy="91440"/>
+          </a:xfrm>
+          <a:prstGeom prst="rect">
+            <a:avLst/>
+          </a:prstGeom>
+          <a:solidFill>
+            <a:srgbClr val="02BDC7"/>
+          </a:solidFill>
+          <a:ln w="12700">
+            <a:solidFill>
+              <a:srgbClr val="02BDC7"/>
+            </a:solidFill>
+            <a:prstDash val="solid"/>
+          </a:ln>
+        </p:spPr>
+      </p:sp>
+      <p:sp>
+        <p:nvSpPr>
+          <p:cNvPr id="20" name="Shape 17"/>
+          <p:cNvSpPr/>
+          <p:nvPr/>
+        </p:nvSpPr>
+        <p:spPr>
+          <a:xfrm>
+            <a:off x="960120" y="4503420"/>
+            <a:ext cx="548640" cy="548640"/>
+          </a:xfrm>
+          <a:prstGeom prst="ellipse">
+            <a:avLst/>
+          </a:prstGeom>
+          <a:solidFill>
+            <a:srgbClr val="02BDC7"/>
+          </a:solidFill>
+          <a:ln w="12700">
+            <a:solidFill>
+              <a:srgbClr val="02BDC7"/>
+            </a:solidFill>
+            <a:prstDash val="solid"/>
+          </a:ln>
+        </p:spPr>
+      </p:sp>
+      <p:sp>
+        <p:nvSpPr>
+          <p:cNvPr id="21" name="Text 18"/>
+          <p:cNvSpPr/>
+          <p:nvPr/>
+        </p:nvSpPr>
+        <p:spPr>
+          <a:xfrm>
+            <a:off x="960120" y="4503420"/>
+            <a:ext cx="548640" cy="548640"/>
+          </a:xfrm>
+          <a:prstGeom prst="rect">
+            <a:avLst/>
+          </a:prstGeom>
+          <a:noFill/>
+          <a:ln/>
+        </p:spPr>
+        <p:txBody>
+          <a:bodyPr wrap="square" lIns="0" tIns="0" rIns="0" bIns="0" rtlCol="0" anchor="ctr"/>
+          <a:lstStyle/>
+          <a:p>
+            <a:pPr algn="ctr" indent="0" marL="0">
+              <a:buNone/>
+            </a:pPr>
+            <a:r>
+              <a:rPr lang="en-US" sz="2200" b="1" dirty="0">
+                <a:solidFill>
+                  <a:srgbClr val="FFFEFA"/>
+                </a:solidFill>
+                <a:latin typeface="Georgia" pitchFamily="34" charset="0"/>
+                <a:ea typeface="Georgia" pitchFamily="34" charset="-122"/>
+                <a:cs typeface="Georgia" pitchFamily="34" charset="-120"/>
+              </a:rPr>
+              <a:t>3</a:t>
+            </a:r>
+            <a:endParaRPr lang="en-US" sz="2200" dirty="0"/>
+          </a:p>
+        </p:txBody>
+      </p:sp>
+      <p:sp>
+        <p:nvSpPr>
+          <p:cNvPr id="22" name="Text 19"/>
+          <p:cNvSpPr/>
+          <p:nvPr/>
+        </p:nvSpPr>
+        <p:spPr>
+          <a:xfrm>
+            <a:off x="1737360" y="4411980"/>
+            <a:ext cx="3924148" cy="1485900"/>
+          </a:xfrm>
+          <a:prstGeom prst="rect">
+            <a:avLst/>
+          </a:prstGeom>
+          <a:noFill/>
+          <a:ln/>
+        </p:spPr>
+        <p:txBody>
+          <a:bodyPr wrap="square" lIns="0" tIns="0" rIns="0" bIns="0" rtlCol="0" anchor="t"/>
+          <a:lstStyle/>
+          <a:p>
+            <a:pPr indent="0" marL="0">
+              <a:buNone/>
+            </a:pPr>
+            <a:r>
+              <a:rPr lang="en-US" sz="2000" dirty="0">
+                <a:solidFill>
+                  <a:srgbClr val="3C3828"/>
+                </a:solidFill>
+                <a:highlight>
+                  <a:srgbClr val="FFE14D"/>
+                </a:highlight>
+                <a:latin typeface="Calibri" pitchFamily="34" charset="0"/>
+                <a:ea typeface="Calibri" pitchFamily="34" charset="-122"/>
+                <a:cs typeface="Calibri" pitchFamily="34" charset="-120"/>
+              </a:rPr>
+              <a:t>The rooms</a:t>
+            </a:r>
+            <a:r>
+              <a:rPr lang="en-US" sz="2000" dirty="0">
+                <a:solidFill>
+                  <a:srgbClr val="3C3828"/>
+                </a:solidFill>
+                <a:latin typeface="Calibri" pitchFamily="34" charset="0"/>
+                <a:ea typeface="Calibri" pitchFamily="34" charset="-122"/>
+                <a:cs typeface="Calibri" pitchFamily="34" charset="-120"/>
+              </a:rPr>
+              <a:t> · You walk them through, pointing out what makes each room worth it. Those are your body paragraphs.</a:t>
+            </a:r>
+            <a:endParaRPr lang="en-US" sz="2000" dirty="0"/>
+          </a:p>
+        </p:txBody>
+      </p:sp>
+      <p:sp>
+        <p:nvSpPr>
+          <p:cNvPr id="23" name="Shape 20"/>
+          <p:cNvSpPr/>
+          <p:nvPr/>
+        </p:nvSpPr>
+        <p:spPr>
+          <a:xfrm>
+            <a:off x="6255868" y="4183380"/>
+            <a:ext cx="5250028" cy="1897380"/>
+          </a:xfrm>
+          <a:prstGeom prst="roundRect">
+            <a:avLst>
+              <a:gd name="adj" fmla="val 6747"/>
+            </a:avLst>
+          </a:prstGeom>
+          <a:solidFill>
+            <a:srgbClr val="FFFEFA"/>
+          </a:solidFill>
+          <a:ln w="9525">
+            <a:solidFill>
+              <a:srgbClr val="D6D4CC"/>
+            </a:solidFill>
+            <a:prstDash val="solid"/>
+          </a:ln>
+          <a:effectLst>
+            <a:outerShdw sx="100000" sy="100000" kx="0" ky="0" algn="bl" rotWithShape="0" blurRad="127000" dist="38100" dir="5400000">
+              <a:srgbClr val="3C3828">
+                <a:alpha val="12000"/>
+              </a:srgbClr>
+            </a:outerShdw>
+          </a:effectLst>
+        </p:spPr>
+      </p:sp>
+      <p:sp>
+        <p:nvSpPr>
+          <p:cNvPr id="24" name="Shape 21"/>
+          <p:cNvSpPr/>
+          <p:nvPr/>
+        </p:nvSpPr>
+        <p:spPr>
+          <a:xfrm>
+            <a:off x="6383884" y="4183380"/>
+            <a:ext cx="4993996" cy="91440"/>
+          </a:xfrm>
+          <a:prstGeom prst="rect">
+            <a:avLst/>
+          </a:prstGeom>
+          <a:solidFill>
+            <a:srgbClr val="FFB600"/>
+          </a:solidFill>
+          <a:ln w="12700">
+            <a:solidFill>
+              <a:srgbClr val="FFB600"/>
+            </a:solidFill>
+            <a:prstDash val="solid"/>
+          </a:ln>
+        </p:spPr>
+      </p:sp>
+      <p:sp>
+        <p:nvSpPr>
+          <p:cNvPr id="25" name="Shape 22"/>
+          <p:cNvSpPr/>
+          <p:nvPr/>
+        </p:nvSpPr>
+        <p:spPr>
+          <a:xfrm>
+            <a:off x="6530188" y="4503420"/>
+            <a:ext cx="548640" cy="548640"/>
+          </a:xfrm>
+          <a:prstGeom prst="ellipse">
+            <a:avLst/>
+          </a:prstGeom>
+          <a:solidFill>
+            <a:srgbClr val="FFB600"/>
+          </a:solidFill>
+          <a:ln w="12700">
+            <a:solidFill>
+              <a:srgbClr val="FFB600"/>
+            </a:solidFill>
+            <a:prstDash val="solid"/>
+          </a:ln>
+        </p:spPr>
+      </p:sp>
+      <p:sp>
+        <p:nvSpPr>
+          <p:cNvPr id="26" name="Text 23"/>
+          <p:cNvSpPr/>
+          <p:nvPr/>
+        </p:nvSpPr>
+        <p:spPr>
+          <a:xfrm>
+            <a:off x="6530188" y="4503420"/>
+            <a:ext cx="548640" cy="548640"/>
+          </a:xfrm>
+          <a:prstGeom prst="rect">
+            <a:avLst/>
+          </a:prstGeom>
+          <a:noFill/>
+          <a:ln/>
+        </p:spPr>
+        <p:txBody>
+          <a:bodyPr wrap="square" lIns="0" tIns="0" rIns="0" bIns="0" rtlCol="0" anchor="ctr"/>
+          <a:lstStyle/>
+          <a:p>
+            <a:pPr algn="ctr" indent="0" marL="0">
+              <a:buNone/>
+            </a:pPr>
+            <a:r>
+              <a:rPr lang="en-US" sz="2200" b="1" dirty="0">
+                <a:solidFill>
+                  <a:srgbClr val="FFFEFA"/>
+                </a:solidFill>
+                <a:latin typeface="Georgia" pitchFamily="34" charset="0"/>
+                <a:ea typeface="Georgia" pitchFamily="34" charset="-122"/>
+                <a:cs typeface="Georgia" pitchFamily="34" charset="-120"/>
+              </a:rPr>
+              <a:t>4</a:t>
+            </a:r>
+            <a:endParaRPr lang="en-US" sz="2200" dirty="0"/>
+          </a:p>
+        </p:txBody>
+      </p:sp>
+      <p:sp>
+        <p:nvSpPr>
+          <p:cNvPr id="27" name="Text 24"/>
+          <p:cNvSpPr/>
+          <p:nvPr/>
+        </p:nvSpPr>
+        <p:spPr>
+          <a:xfrm>
+            <a:off x="7307428" y="4411980"/>
+            <a:ext cx="3924148" cy="1485900"/>
+          </a:xfrm>
+          <a:prstGeom prst="rect">
+            <a:avLst/>
+          </a:prstGeom>
+          <a:noFill/>
+          <a:ln/>
+        </p:spPr>
+        <p:txBody>
+          <a:bodyPr wrap="square" lIns="0" tIns="0" rIns="0" bIns="0" rtlCol="0" anchor="t"/>
+          <a:lstStyle/>
+          <a:p>
+            <a:pPr indent="0" marL="0">
+              <a:buNone/>
+            </a:pPr>
+            <a:r>
+              <a:rPr lang="en-US" sz="2000" dirty="0">
+                <a:solidFill>
+                  <a:srgbClr val="3C3828"/>
+                </a:solidFill>
+                <a:highlight>
+                  <a:srgbClr val="FFE14D"/>
+                </a:highlight>
+                <a:latin typeface="Calibri" pitchFamily="34" charset="0"/>
+                <a:ea typeface="Calibri" pitchFamily="34" charset="-122"/>
+                <a:cs typeface="Calibri" pitchFamily="34" charset="-120"/>
+              </a:rPr>
+              <a:t>Back at the door</a:t>
+            </a:r>
+            <a:r>
+              <a:rPr lang="en-US" sz="2000" dirty="0">
+                <a:solidFill>
+                  <a:srgbClr val="3C3828"/>
+                </a:solidFill>
+                <a:latin typeface="Calibri" pitchFamily="34" charset="0"/>
+                <a:ea typeface="Calibri" pitchFamily="34" charset="-122"/>
+                <a:cs typeface="Calibri" pitchFamily="34" charset="-120"/>
+              </a:rPr>
+              <a:t> · You step out, point at the neighborhood, and leave gracefully. That’s your conclusion.</a:t>
             </a:r>
             <a:endParaRPr lang="en-US" sz="2000" dirty="0"/>
           </a:p>
@@ -12513,13 +12988,13 @@
             <a:r>
               <a:rPr lang="en-US" sz="1200" b="1" spc="200" kern="0" dirty="0">
                 <a:solidFill>
-                  <a:srgbClr val="FF9755"/>
+                  <a:srgbClr val="FFB600"/>
                 </a:solidFill>
                 <a:latin typeface="Consolas" pitchFamily="34" charset="0"/>
                 <a:ea typeface="Consolas" pitchFamily="34" charset="-122"/>
                 <a:cs typeface="Consolas" pitchFamily="34" charset="-120"/>
               </a:rPr>
-              <a:t>THE HOUSE ANALOGY</a:t>
+              <a:t>YOUR TURN</a:t>
             </a:r>
             <a:endParaRPr lang="en-US" sz="1200" dirty="0"/>
           </a:p>
@@ -12550,7 +13025,7 @@
               <a:buNone/>
             </a:pPr>
             <a:r>
-              <a:rPr lang="en-US" sz="3000" dirty="0">
+              <a:rPr lang="en-US" sz="3600" dirty="0">
                 <a:solidFill>
                   <a:srgbClr val="3C3828"/>
                 </a:solidFill>
@@ -12558,9 +13033,9 @@
                 <a:ea typeface="Georgia" pitchFamily="34" charset="-122"/>
                 <a:cs typeface="Georgia" pitchFamily="34" charset="-120"/>
               </a:rPr>
-              <a:t>Your essay is a house, and you’re showing it</a:t>
-            </a:r>
-            <a:endParaRPr lang="en-US" sz="3000" dirty="0"/>
+              <a:t>What it looks like</a:t>
+            </a:r>
+            <a:endParaRPr lang="en-US" sz="3600" dirty="0"/>
           </a:p>
         </p:txBody>
       </p:sp>
@@ -12572,26 +13047,35 @@
         </p:nvSpPr>
         <p:spPr>
           <a:xfrm>
-            <a:off x="10637215" y="457200"/>
-            <a:ext cx="868680" cy="868680"/>
-          </a:xfrm>
-          <a:prstGeom prst="ellipse">
-            <a:avLst/>
-          </a:prstGeom>
-          <a:solidFill>
-            <a:srgbClr val="FF9755"/>
-          </a:solidFill>
-          <a:ln w="12700">
-            <a:solidFill>
-              <a:srgbClr val="FF9755"/>
-            </a:solidFill>
-            <a:prstDash val="solid"/>
-          </a:ln>
+            <a:off x="685800" y="1828800"/>
+            <a:ext cx="6949440" cy="4150360"/>
+          </a:xfrm>
+          <a:prstGeom prst="roundRect">
+            <a:avLst>
+              <a:gd name="adj" fmla="val 3084"/>
+            </a:avLst>
+          </a:prstGeom>
+          <a:solidFill>
+            <a:srgbClr val="FFFEFA"/>
+          </a:solidFill>
+          <a:ln w="9525">
+            <a:solidFill>
+              <a:srgbClr val="D6D4CC"/>
+            </a:solidFill>
+            <a:prstDash val="solid"/>
+          </a:ln>
+          <a:effectLst>
+            <a:outerShdw sx="100000" sy="100000" kx="0" ky="0" algn="bl" rotWithShape="0" blurRad="127000" dist="38100" dir="5400000">
+              <a:srgbClr val="3C3828">
+                <a:alpha val="12000"/>
+              </a:srgbClr>
+            </a:outerShdw>
+          </a:effectLst>
         </p:spPr>
       </p:sp>
       <p:pic>
         <p:nvPicPr>
-          <p:cNvPr id="5" name="Image 0" descr="pencil icon">    </p:cNvPr>
+          <p:cNvPr id="5" name="Image 0" descr="The YAWP! editor on the Body Paragraphs step.">    </p:cNvPr>
           <p:cNvPicPr>
             <a:picLocks noChangeAspect="1"/>
           </p:cNvPicPr>
@@ -12605,8 +13089,8 @@
         </p:blipFill>
         <p:spPr>
           <a:xfrm>
-            <a:off x="10810951" y="630936"/>
-            <a:ext cx="521208" cy="521208"/>
+            <a:off x="813816" y="1956816"/>
+            <a:ext cx="6693408" cy="3894328"/>
           </a:xfrm>
           <a:prstGeom prst="rect">
             <a:avLst/>
@@ -12621,42 +13105,17 @@
         </p:nvSpPr>
         <p:spPr>
           <a:xfrm>
-            <a:off x="10344607" y="530352"/>
-            <a:ext cx="182880" cy="182880"/>
+            <a:off x="8183880" y="2505456"/>
+            <a:ext cx="292608" cy="292608"/>
           </a:xfrm>
           <a:prstGeom prst="ellipse">
             <a:avLst/>
           </a:prstGeom>
           <a:solidFill>
-            <a:srgbClr val="02BDC7"/>
+            <a:srgbClr val="FFB600"/>
           </a:solidFill>
           <a:ln w="12700">
             <a:solidFill>
-              <a:srgbClr val="02BDC7"/>
-            </a:solidFill>
-            <a:prstDash val="solid"/>
-          </a:ln>
-        </p:spPr>
-      </p:sp>
-      <p:sp>
-        <p:nvSpPr>
-          <p:cNvPr id="7" name="Shape 4"/>
-          <p:cNvSpPr/>
-          <p:nvPr/>
-        </p:nvSpPr>
-        <p:spPr>
-          <a:xfrm>
-            <a:off x="11460175" y="1307592"/>
-            <a:ext cx="128016" cy="128016"/>
-          </a:xfrm>
-          <a:prstGeom prst="ellipse">
-            <a:avLst/>
-          </a:prstGeom>
-          <a:solidFill>
-            <a:srgbClr val="FFB600"/>
-          </a:solidFill>
-          <a:ln w="12700">
-            <a:solidFill>
               <a:srgbClr val="FFB600"/>
             </a:solidFill>
             <a:prstDash val="solid"/>
@@ -12665,98 +13124,14 @@
       </p:sp>
       <p:sp>
         <p:nvSpPr>
-          <p:cNvPr id="8" name="Shape 5"/>
-          <p:cNvSpPr/>
-          <p:nvPr/>
-        </p:nvSpPr>
-        <p:spPr>
-          <a:xfrm>
-            <a:off x="685800" y="1965960"/>
-            <a:ext cx="5250028" cy="1897380"/>
-          </a:xfrm>
-          <a:prstGeom prst="roundRect">
-            <a:avLst>
-              <a:gd name="adj" fmla="val 6747"/>
-            </a:avLst>
-          </a:prstGeom>
-          <a:solidFill>
-            <a:srgbClr val="FFFEFA"/>
-          </a:solidFill>
-          <a:ln w="9525">
-            <a:solidFill>
-              <a:srgbClr val="D6D4CC"/>
-            </a:solidFill>
-            <a:prstDash val="solid"/>
-          </a:ln>
-          <a:effectLst>
-            <a:outerShdw sx="100000" sy="100000" kx="0" ky="0" algn="bl" rotWithShape="0" blurRad="127000" dist="38100" dir="5400000">
-              <a:srgbClr val="3C3828">
-                <a:alpha val="12000"/>
-              </a:srgbClr>
-            </a:outerShdw>
-          </a:effectLst>
-        </p:spPr>
-      </p:sp>
-      <p:sp>
-        <p:nvSpPr>
-          <p:cNvPr id="9" name="Shape 6"/>
-          <p:cNvSpPr/>
-          <p:nvPr/>
-        </p:nvSpPr>
-        <p:spPr>
-          <a:xfrm>
-            <a:off x="813816" y="1965960"/>
-            <a:ext cx="4993996" cy="91440"/>
-          </a:xfrm>
-          <a:prstGeom prst="rect">
-            <a:avLst/>
-          </a:prstGeom>
-          <a:solidFill>
-            <a:srgbClr val="FF9755"/>
-          </a:solidFill>
-          <a:ln w="12700">
-            <a:solidFill>
-              <a:srgbClr val="FF9755"/>
-            </a:solidFill>
-            <a:prstDash val="solid"/>
-          </a:ln>
-        </p:spPr>
-      </p:sp>
-      <p:sp>
-        <p:nvSpPr>
-          <p:cNvPr id="10" name="Shape 7"/>
-          <p:cNvSpPr/>
-          <p:nvPr/>
-        </p:nvSpPr>
-        <p:spPr>
-          <a:xfrm>
-            <a:off x="960120" y="2286000"/>
-            <a:ext cx="548640" cy="548640"/>
-          </a:xfrm>
-          <a:prstGeom prst="ellipse">
-            <a:avLst/>
-          </a:prstGeom>
-          <a:solidFill>
-            <a:srgbClr val="FF9755"/>
-          </a:solidFill>
-          <a:ln w="12700">
-            <a:solidFill>
-              <a:srgbClr val="FF9755"/>
-            </a:solidFill>
-            <a:prstDash val="solid"/>
-          </a:ln>
-        </p:spPr>
-      </p:sp>
-      <p:sp>
-        <p:nvSpPr>
-          <p:cNvPr id="11" name="Text 8"/>
-          <p:cNvSpPr/>
-          <p:nvPr/>
-        </p:nvSpPr>
-        <p:spPr>
-          <a:xfrm>
-            <a:off x="960120" y="2286000"/>
-            <a:ext cx="548640" cy="548640"/>
+          <p:cNvPr id="7" name="Text 4"/>
+          <p:cNvSpPr/>
+          <p:nvPr/>
+        </p:nvSpPr>
+        <p:spPr>
+          <a:xfrm>
+            <a:off x="8659368" y="2194560"/>
+            <a:ext cx="2846527" cy="914400"/>
           </a:xfrm>
           <a:prstGeom prst="rect">
             <a:avLst/>
@@ -12768,48 +13143,20 @@
           <a:bodyPr wrap="square" lIns="0" tIns="0" rIns="0" bIns="0" rtlCol="0" anchor="ctr"/>
           <a:lstStyle/>
           <a:p>
-            <a:pPr algn="ctr" indent="0" marL="0">
-              <a:buNone/>
-            </a:pPr>
-            <a:r>
-              <a:rPr lang="en-US" sz="2200" b="1" dirty="0">
-                <a:solidFill>
-                  <a:srgbClr val="FFFEFA"/>
-                </a:solidFill>
-                <a:latin typeface="Georgia" pitchFamily="34" charset="0"/>
-                <a:ea typeface="Georgia" pitchFamily="34" charset="-122"/>
-                <a:cs typeface="Georgia" pitchFamily="34" charset="-120"/>
-              </a:rPr>
-              <a:t>1</a:t>
-            </a:r>
-            <a:endParaRPr lang="en-US" sz="2200" dirty="0"/>
-          </a:p>
-        </p:txBody>
-      </p:sp>
-      <p:sp>
-        <p:nvSpPr>
-          <p:cNvPr id="12" name="Text 9"/>
-          <p:cNvSpPr/>
-          <p:nvPr/>
-        </p:nvSpPr>
-        <p:spPr>
-          <a:xfrm>
-            <a:off x="1737360" y="2194560"/>
-            <a:ext cx="3924148" cy="1485900"/>
-          </a:xfrm>
-          <a:prstGeom prst="rect">
-            <a:avLst/>
-          </a:prstGeom>
-          <a:noFill/>
-          <a:ln/>
-        </p:spPr>
-        <p:txBody>
-          <a:bodyPr wrap="square" lIns="0" tIns="0" rIns="0" bIns="0" rtlCol="0" anchor="t"/>
-          <a:lstStyle/>
-          <a:p>
             <a:pPr indent="0" marL="0">
               <a:buNone/>
             </a:pPr>
+            <a:r>
+              <a:rPr lang="en-US" sz="2000" dirty="0">
+                <a:solidFill>
+                  <a:srgbClr val="3C3828"/>
+                </a:solidFill>
+                <a:latin typeface="Calibri" pitchFamily="34" charset="0"/>
+                <a:ea typeface="Calibri" pitchFamily="34" charset="-122"/>
+                <a:cs typeface="Calibri" pitchFamily="34" charset="-120"/>
+              </a:rPr>
+              <a:t>The Tutor says </a:t>
+            </a:r>
             <a:r>
               <a:rPr lang="en-US" sz="2000" dirty="0">
                 <a:solidFill>
@@ -12822,8 +13169,61 @@
                 <a:ea typeface="Calibri" pitchFamily="34" charset="-122"/>
                 <a:cs typeface="Calibri" pitchFamily="34" charset="-120"/>
               </a:rPr>
-              <a:t>The neighborhood</a:t>
-            </a:r>
+              <a:t>Body Paragraphs</a:t>
+            </a:r>
+            <a:endParaRPr lang="en-US" sz="2000" dirty="0"/>
+          </a:p>
+        </p:txBody>
+      </p:sp>
+      <p:sp>
+        <p:nvSpPr>
+          <p:cNvPr id="8" name="Shape 5"/>
+          <p:cNvSpPr/>
+          <p:nvPr/>
+        </p:nvSpPr>
+        <p:spPr>
+          <a:xfrm>
+            <a:off x="8183880" y="3419856"/>
+            <a:ext cx="292608" cy="292608"/>
+          </a:xfrm>
+          <a:prstGeom prst="ellipse">
+            <a:avLst/>
+          </a:prstGeom>
+          <a:solidFill>
+            <a:srgbClr val="FC4540"/>
+          </a:solidFill>
+          <a:ln w="12700">
+            <a:solidFill>
+              <a:srgbClr val="FC4540"/>
+            </a:solidFill>
+            <a:prstDash val="solid"/>
+          </a:ln>
+        </p:spPr>
+      </p:sp>
+      <p:sp>
+        <p:nvSpPr>
+          <p:cNvPr id="9" name="Text 6"/>
+          <p:cNvSpPr/>
+          <p:nvPr/>
+        </p:nvSpPr>
+        <p:spPr>
+          <a:xfrm>
+            <a:off x="8659368" y="3108960"/>
+            <a:ext cx="2846527" cy="914400"/>
+          </a:xfrm>
+          <a:prstGeom prst="rect">
+            <a:avLst/>
+          </a:prstGeom>
+          <a:noFill/>
+          <a:ln/>
+        </p:spPr>
+        <p:txBody>
+          <a:bodyPr wrap="square" lIns="0" tIns="0" rIns="0" bIns="0" rtlCol="0" anchor="ctr"/>
+          <a:lstStyle/>
+          <a:p>
+            <a:pPr indent="0" marL="0">
+              <a:buNone/>
+            </a:pPr>
             <a:r>
               <a:rPr lang="en-US" sz="2000" dirty="0">
                 <a:solidFill>
@@ -12833,7 +13233,7 @@
                 <a:ea typeface="Calibri" pitchFamily="34" charset="-122"/>
                 <a:cs typeface="Calibri" pitchFamily="34" charset="-120"/>
               </a:rPr>
-              <a:t> · Driving in, your reader gets a sense of where they are. That’s your introduction: context.</a:t>
+              <a:t>Your thesis, in its parts</a:t>
             </a:r>
             <a:endParaRPr lang="en-US" sz="2000" dirty="0"/>
           </a:p>
@@ -12841,98 +13241,39 @@
       </p:sp>
       <p:sp>
         <p:nvSpPr>
-          <p:cNvPr id="13" name="Shape 10"/>
-          <p:cNvSpPr/>
-          <p:nvPr/>
-        </p:nvSpPr>
-        <p:spPr>
-          <a:xfrm>
-            <a:off x="6255868" y="1965960"/>
-            <a:ext cx="5250028" cy="1897380"/>
-          </a:xfrm>
-          <a:prstGeom prst="roundRect">
-            <a:avLst>
-              <a:gd name="adj" fmla="val 6747"/>
-            </a:avLst>
-          </a:prstGeom>
-          <a:solidFill>
-            <a:srgbClr val="FFFEFA"/>
-          </a:solidFill>
-          <a:ln w="9525">
-            <a:solidFill>
-              <a:srgbClr val="D6D4CC"/>
-            </a:solidFill>
-            <a:prstDash val="solid"/>
-          </a:ln>
-          <a:effectLst>
-            <a:outerShdw sx="100000" sy="100000" kx="0" ky="0" algn="bl" rotWithShape="0" blurRad="127000" dist="38100" dir="5400000">
-              <a:srgbClr val="3C3828">
-                <a:alpha val="12000"/>
-              </a:srgbClr>
-            </a:outerShdw>
-          </a:effectLst>
-        </p:spPr>
-      </p:sp>
-      <p:sp>
-        <p:nvSpPr>
-          <p:cNvPr id="14" name="Shape 11"/>
-          <p:cNvSpPr/>
-          <p:nvPr/>
-        </p:nvSpPr>
-        <p:spPr>
-          <a:xfrm>
-            <a:off x="6383884" y="1965960"/>
-            <a:ext cx="4993996" cy="91440"/>
-          </a:xfrm>
-          <a:prstGeom prst="rect">
-            <a:avLst/>
-          </a:prstGeom>
-          <a:solidFill>
-            <a:srgbClr val="FC4067"/>
+          <p:cNvPr id="10" name="Shape 7"/>
+          <p:cNvSpPr/>
+          <p:nvPr/>
+        </p:nvSpPr>
+        <p:spPr>
+          <a:xfrm>
+            <a:off x="8183880" y="4334256"/>
+            <a:ext cx="292608" cy="292608"/>
+          </a:xfrm>
+          <a:prstGeom prst="ellipse">
+            <a:avLst/>
+          </a:prstGeom>
+          <a:solidFill>
+            <a:srgbClr val="FF9755"/>
           </a:solidFill>
           <a:ln w="12700">
             <a:solidFill>
-              <a:srgbClr val="FC4067"/>
-            </a:solidFill>
-            <a:prstDash val="solid"/>
-          </a:ln>
-        </p:spPr>
-      </p:sp>
-      <p:sp>
-        <p:nvSpPr>
-          <p:cNvPr id="15" name="Shape 12"/>
-          <p:cNvSpPr/>
-          <p:nvPr/>
-        </p:nvSpPr>
-        <p:spPr>
-          <a:xfrm>
-            <a:off x="6530188" y="2286000"/>
-            <a:ext cx="548640" cy="548640"/>
-          </a:xfrm>
-          <a:prstGeom prst="ellipse">
-            <a:avLst/>
-          </a:prstGeom>
-          <a:solidFill>
-            <a:srgbClr val="FC4067"/>
-          </a:solidFill>
-          <a:ln w="12700">
-            <a:solidFill>
-              <a:srgbClr val="FC4067"/>
-            </a:solidFill>
-            <a:prstDash val="solid"/>
-          </a:ln>
-        </p:spPr>
-      </p:sp>
-      <p:sp>
-        <p:nvSpPr>
-          <p:cNvPr id="16" name="Text 13"/>
-          <p:cNvSpPr/>
-          <p:nvPr/>
-        </p:nvSpPr>
-        <p:spPr>
-          <a:xfrm>
-            <a:off x="6530188" y="2286000"/>
-            <a:ext cx="548640" cy="548640"/>
+              <a:srgbClr val="FF9755"/>
+            </a:solidFill>
+            <a:prstDash val="solid"/>
+          </a:ln>
+        </p:spPr>
+      </p:sp>
+      <p:sp>
+        <p:nvSpPr>
+          <p:cNvPr id="11" name="Text 8"/>
+          <p:cNvSpPr/>
+          <p:nvPr/>
+        </p:nvSpPr>
+        <p:spPr>
+          <a:xfrm>
+            <a:off x="8659368" y="4023360"/>
+            <a:ext cx="2846527" cy="914400"/>
           </a:xfrm>
           <a:prstGeom prst="rect">
             <a:avLst/>
@@ -12944,45 +13285,6 @@
           <a:bodyPr wrap="square" lIns="0" tIns="0" rIns="0" bIns="0" rtlCol="0" anchor="ctr"/>
           <a:lstStyle/>
           <a:p>
-            <a:pPr algn="ctr" indent="0" marL="0">
-              <a:buNone/>
-            </a:pPr>
-            <a:r>
-              <a:rPr lang="en-US" sz="2200" b="1" dirty="0">
-                <a:solidFill>
-                  <a:srgbClr val="FFFEFA"/>
-                </a:solidFill>
-                <a:latin typeface="Georgia" pitchFamily="34" charset="0"/>
-                <a:ea typeface="Georgia" pitchFamily="34" charset="-122"/>
-                <a:cs typeface="Georgia" pitchFamily="34" charset="-120"/>
-              </a:rPr>
-              <a:t>2</a:t>
-            </a:r>
-            <a:endParaRPr lang="en-US" sz="2200" dirty="0"/>
-          </a:p>
-        </p:txBody>
-      </p:sp>
-      <p:sp>
-        <p:nvSpPr>
-          <p:cNvPr id="17" name="Text 14"/>
-          <p:cNvSpPr/>
-          <p:nvPr/>
-        </p:nvSpPr>
-        <p:spPr>
-          <a:xfrm>
-            <a:off x="7307428" y="2194560"/>
-            <a:ext cx="3924148" cy="1485900"/>
-          </a:xfrm>
-          <a:prstGeom prst="rect">
-            <a:avLst/>
-          </a:prstGeom>
-          <a:noFill/>
-          <a:ln/>
-        </p:spPr>
-        <p:txBody>
-          <a:bodyPr wrap="square" lIns="0" tIns="0" rIns="0" bIns="0" rtlCol="0" anchor="t"/>
-          <a:lstStyle/>
-          <a:p>
             <a:pPr indent="0" marL="0">
               <a:buNone/>
             </a:pPr>
@@ -12991,15 +13293,65 @@
                 <a:solidFill>
                   <a:srgbClr val="3C3828"/>
                 </a:solidFill>
-                <a:highlight>
-                  <a:srgbClr val="FFE14D"/>
-                </a:highlight>
                 <a:latin typeface="Calibri" pitchFamily="34" charset="0"/>
                 <a:ea typeface="Calibri" pitchFamily="34" charset="-122"/>
                 <a:cs typeface="Calibri" pitchFamily="34" charset="-120"/>
               </a:rPr>
-              <a:t>The front door</a:t>
-            </a:r>
+              <a:t>One paragraph per part</a:t>
+            </a:r>
+            <a:endParaRPr lang="en-US" sz="2000" dirty="0"/>
+          </a:p>
+        </p:txBody>
+      </p:sp>
+      <p:sp>
+        <p:nvSpPr>
+          <p:cNvPr id="12" name="Shape 9"/>
+          <p:cNvSpPr/>
+          <p:nvPr/>
+        </p:nvSpPr>
+        <p:spPr>
+          <a:xfrm>
+            <a:off x="8183880" y="5248656"/>
+            <a:ext cx="292608" cy="292608"/>
+          </a:xfrm>
+          <a:prstGeom prst="ellipse">
+            <a:avLst/>
+          </a:prstGeom>
+          <a:solidFill>
+            <a:srgbClr val="FC4067"/>
+          </a:solidFill>
+          <a:ln w="12700">
+            <a:solidFill>
+              <a:srgbClr val="FC4067"/>
+            </a:solidFill>
+            <a:prstDash val="solid"/>
+          </a:ln>
+        </p:spPr>
+      </p:sp>
+      <p:sp>
+        <p:nvSpPr>
+          <p:cNvPr id="13" name="Text 10"/>
+          <p:cNvSpPr/>
+          <p:nvPr/>
+        </p:nvSpPr>
+        <p:spPr>
+          <a:xfrm>
+            <a:off x="8659368" y="4937760"/>
+            <a:ext cx="2846527" cy="914400"/>
+          </a:xfrm>
+          <a:prstGeom prst="rect">
+            <a:avLst/>
+          </a:prstGeom>
+          <a:noFill/>
+          <a:ln/>
+        </p:spPr>
+        <p:txBody>
+          <a:bodyPr wrap="square" lIns="0" tIns="0" rIns="0" bIns="0" rtlCol="0" anchor="ctr"/>
+          <a:lstStyle/>
+          <a:p>
+            <a:pPr indent="0" marL="0">
+              <a:buNone/>
+            </a:pPr>
             <a:r>
               <a:rPr lang="en-US" sz="2000" dirty="0">
                 <a:solidFill>
@@ -13009,359 +13361,7 @@
                 <a:ea typeface="Calibri" pitchFamily="34" charset="-122"/>
                 <a:cs typeface="Calibri" pitchFamily="34" charset="-120"/>
               </a:rPr>
-              <a:t> · They step into the foyer and see the whole house at once. That’s your thesis statement.</a:t>
-            </a:r>
-            <a:endParaRPr lang="en-US" sz="2000" dirty="0"/>
-          </a:p>
-        </p:txBody>
-      </p:sp>
-      <p:sp>
-        <p:nvSpPr>
-          <p:cNvPr id="18" name="Shape 15"/>
-          <p:cNvSpPr/>
-          <p:nvPr/>
-        </p:nvSpPr>
-        <p:spPr>
-          <a:xfrm>
-            <a:off x="685800" y="4183380"/>
-            <a:ext cx="5250028" cy="1897380"/>
-          </a:xfrm>
-          <a:prstGeom prst="roundRect">
-            <a:avLst>
-              <a:gd name="adj" fmla="val 6747"/>
-            </a:avLst>
-          </a:prstGeom>
-          <a:solidFill>
-            <a:srgbClr val="FFFEFA"/>
-          </a:solidFill>
-          <a:ln w="9525">
-            <a:solidFill>
-              <a:srgbClr val="D6D4CC"/>
-            </a:solidFill>
-            <a:prstDash val="solid"/>
-          </a:ln>
-          <a:effectLst>
-            <a:outerShdw sx="100000" sy="100000" kx="0" ky="0" algn="bl" rotWithShape="0" blurRad="127000" dist="38100" dir="5400000">
-              <a:srgbClr val="3C3828">
-                <a:alpha val="12000"/>
-              </a:srgbClr>
-            </a:outerShdw>
-          </a:effectLst>
-        </p:spPr>
-      </p:sp>
-      <p:sp>
-        <p:nvSpPr>
-          <p:cNvPr id="19" name="Shape 16"/>
-          <p:cNvSpPr/>
-          <p:nvPr/>
-        </p:nvSpPr>
-        <p:spPr>
-          <a:xfrm>
-            <a:off x="813816" y="4183380"/>
-            <a:ext cx="4993996" cy="91440"/>
-          </a:xfrm>
-          <a:prstGeom prst="rect">
-            <a:avLst/>
-          </a:prstGeom>
-          <a:solidFill>
-            <a:srgbClr val="02BDC7"/>
-          </a:solidFill>
-          <a:ln w="12700">
-            <a:solidFill>
-              <a:srgbClr val="02BDC7"/>
-            </a:solidFill>
-            <a:prstDash val="solid"/>
-          </a:ln>
-        </p:spPr>
-      </p:sp>
-      <p:sp>
-        <p:nvSpPr>
-          <p:cNvPr id="20" name="Shape 17"/>
-          <p:cNvSpPr/>
-          <p:nvPr/>
-        </p:nvSpPr>
-        <p:spPr>
-          <a:xfrm>
-            <a:off x="960120" y="4503420"/>
-            <a:ext cx="548640" cy="548640"/>
-          </a:xfrm>
-          <a:prstGeom prst="ellipse">
-            <a:avLst/>
-          </a:prstGeom>
-          <a:solidFill>
-            <a:srgbClr val="02BDC7"/>
-          </a:solidFill>
-          <a:ln w="12700">
-            <a:solidFill>
-              <a:srgbClr val="02BDC7"/>
-            </a:solidFill>
-            <a:prstDash val="solid"/>
-          </a:ln>
-        </p:spPr>
-      </p:sp>
-      <p:sp>
-        <p:nvSpPr>
-          <p:cNvPr id="21" name="Text 18"/>
-          <p:cNvSpPr/>
-          <p:nvPr/>
-        </p:nvSpPr>
-        <p:spPr>
-          <a:xfrm>
-            <a:off x="960120" y="4503420"/>
-            <a:ext cx="548640" cy="548640"/>
-          </a:xfrm>
-          <a:prstGeom prst="rect">
-            <a:avLst/>
-          </a:prstGeom>
-          <a:noFill/>
-          <a:ln/>
-        </p:spPr>
-        <p:txBody>
-          <a:bodyPr wrap="square" lIns="0" tIns="0" rIns="0" bIns="0" rtlCol="0" anchor="ctr"/>
-          <a:lstStyle/>
-          <a:p>
-            <a:pPr algn="ctr" indent="0" marL="0">
-              <a:buNone/>
-            </a:pPr>
-            <a:r>
-              <a:rPr lang="en-US" sz="2200" b="1" dirty="0">
-                <a:solidFill>
-                  <a:srgbClr val="FFFEFA"/>
-                </a:solidFill>
-                <a:latin typeface="Georgia" pitchFamily="34" charset="0"/>
-                <a:ea typeface="Georgia" pitchFamily="34" charset="-122"/>
-                <a:cs typeface="Georgia" pitchFamily="34" charset="-120"/>
-              </a:rPr>
-              <a:t>3</a:t>
-            </a:r>
-            <a:endParaRPr lang="en-US" sz="2200" dirty="0"/>
-          </a:p>
-        </p:txBody>
-      </p:sp>
-      <p:sp>
-        <p:nvSpPr>
-          <p:cNvPr id="22" name="Text 19"/>
-          <p:cNvSpPr/>
-          <p:nvPr/>
-        </p:nvSpPr>
-        <p:spPr>
-          <a:xfrm>
-            <a:off x="1737360" y="4411980"/>
-            <a:ext cx="3924148" cy="1485900"/>
-          </a:xfrm>
-          <a:prstGeom prst="rect">
-            <a:avLst/>
-          </a:prstGeom>
-          <a:noFill/>
-          <a:ln/>
-        </p:spPr>
-        <p:txBody>
-          <a:bodyPr wrap="square" lIns="0" tIns="0" rIns="0" bIns="0" rtlCol="0" anchor="t"/>
-          <a:lstStyle/>
-          <a:p>
-            <a:pPr indent="0" marL="0">
-              <a:buNone/>
-            </a:pPr>
-            <a:r>
-              <a:rPr lang="en-US" sz="2000" dirty="0">
-                <a:solidFill>
-                  <a:srgbClr val="3C3828"/>
-                </a:solidFill>
-                <a:highlight>
-                  <a:srgbClr val="FFE14D"/>
-                </a:highlight>
-                <a:latin typeface="Calibri" pitchFamily="34" charset="0"/>
-                <a:ea typeface="Calibri" pitchFamily="34" charset="-122"/>
-                <a:cs typeface="Calibri" pitchFamily="34" charset="-120"/>
-              </a:rPr>
-              <a:t>The rooms</a:t>
-            </a:r>
-            <a:r>
-              <a:rPr lang="en-US" sz="2000" dirty="0">
-                <a:solidFill>
-                  <a:srgbClr val="3C3828"/>
-                </a:solidFill>
-                <a:latin typeface="Calibri" pitchFamily="34" charset="0"/>
-                <a:ea typeface="Calibri" pitchFamily="34" charset="-122"/>
-                <a:cs typeface="Calibri" pitchFamily="34" charset="-120"/>
-              </a:rPr>
-              <a:t> · You walk them through, pointing out what makes each room worth it. Those are your body paragraphs.</a:t>
-            </a:r>
-            <a:endParaRPr lang="en-US" sz="2000" dirty="0"/>
-          </a:p>
-        </p:txBody>
-      </p:sp>
-      <p:sp>
-        <p:nvSpPr>
-          <p:cNvPr id="23" name="Shape 20"/>
-          <p:cNvSpPr/>
-          <p:nvPr/>
-        </p:nvSpPr>
-        <p:spPr>
-          <a:xfrm>
-            <a:off x="6255868" y="4183380"/>
-            <a:ext cx="5250028" cy="1897380"/>
-          </a:xfrm>
-          <a:prstGeom prst="roundRect">
-            <a:avLst>
-              <a:gd name="adj" fmla="val 6747"/>
-            </a:avLst>
-          </a:prstGeom>
-          <a:solidFill>
-            <a:srgbClr val="FFFEFA"/>
-          </a:solidFill>
-          <a:ln w="9525">
-            <a:solidFill>
-              <a:srgbClr val="D6D4CC"/>
-            </a:solidFill>
-            <a:prstDash val="solid"/>
-          </a:ln>
-          <a:effectLst>
-            <a:outerShdw sx="100000" sy="100000" kx="0" ky="0" algn="bl" rotWithShape="0" blurRad="127000" dist="38100" dir="5400000">
-              <a:srgbClr val="3C3828">
-                <a:alpha val="12000"/>
-              </a:srgbClr>
-            </a:outerShdw>
-          </a:effectLst>
-        </p:spPr>
-      </p:sp>
-      <p:sp>
-        <p:nvSpPr>
-          <p:cNvPr id="24" name="Shape 21"/>
-          <p:cNvSpPr/>
-          <p:nvPr/>
-        </p:nvSpPr>
-        <p:spPr>
-          <a:xfrm>
-            <a:off x="6383884" y="4183380"/>
-            <a:ext cx="4993996" cy="91440"/>
-          </a:xfrm>
-          <a:prstGeom prst="rect">
-            <a:avLst/>
-          </a:prstGeom>
-          <a:solidFill>
-            <a:srgbClr val="FFB600"/>
-          </a:solidFill>
-          <a:ln w="12700">
-            <a:solidFill>
-              <a:srgbClr val="FFB600"/>
-            </a:solidFill>
-            <a:prstDash val="solid"/>
-          </a:ln>
-        </p:spPr>
-      </p:sp>
-      <p:sp>
-        <p:nvSpPr>
-          <p:cNvPr id="25" name="Shape 22"/>
-          <p:cNvSpPr/>
-          <p:nvPr/>
-        </p:nvSpPr>
-        <p:spPr>
-          <a:xfrm>
-            <a:off x="6530188" y="4503420"/>
-            <a:ext cx="548640" cy="548640"/>
-          </a:xfrm>
-          <a:prstGeom prst="ellipse">
-            <a:avLst/>
-          </a:prstGeom>
-          <a:solidFill>
-            <a:srgbClr val="FFB600"/>
-          </a:solidFill>
-          <a:ln w="12700">
-            <a:solidFill>
-              <a:srgbClr val="FFB600"/>
-            </a:solidFill>
-            <a:prstDash val="solid"/>
-          </a:ln>
-        </p:spPr>
-      </p:sp>
-      <p:sp>
-        <p:nvSpPr>
-          <p:cNvPr id="26" name="Text 23"/>
-          <p:cNvSpPr/>
-          <p:nvPr/>
-        </p:nvSpPr>
-        <p:spPr>
-          <a:xfrm>
-            <a:off x="6530188" y="4503420"/>
-            <a:ext cx="548640" cy="548640"/>
-          </a:xfrm>
-          <a:prstGeom prst="rect">
-            <a:avLst/>
-          </a:prstGeom>
-          <a:noFill/>
-          <a:ln/>
-        </p:spPr>
-        <p:txBody>
-          <a:bodyPr wrap="square" lIns="0" tIns="0" rIns="0" bIns="0" rtlCol="0" anchor="ctr"/>
-          <a:lstStyle/>
-          <a:p>
-            <a:pPr algn="ctr" indent="0" marL="0">
-              <a:buNone/>
-            </a:pPr>
-            <a:r>
-              <a:rPr lang="en-US" sz="2200" b="1" dirty="0">
-                <a:solidFill>
-                  <a:srgbClr val="FFFEFA"/>
-                </a:solidFill>
-                <a:latin typeface="Georgia" pitchFamily="34" charset="0"/>
-                <a:ea typeface="Georgia" pitchFamily="34" charset="-122"/>
-                <a:cs typeface="Georgia" pitchFamily="34" charset="-120"/>
-              </a:rPr>
-              <a:t>4</a:t>
-            </a:r>
-            <a:endParaRPr lang="en-US" sz="2200" dirty="0"/>
-          </a:p>
-        </p:txBody>
-      </p:sp>
-      <p:sp>
-        <p:nvSpPr>
-          <p:cNvPr id="27" name="Text 24"/>
-          <p:cNvSpPr/>
-          <p:nvPr/>
-        </p:nvSpPr>
-        <p:spPr>
-          <a:xfrm>
-            <a:off x="7307428" y="4411980"/>
-            <a:ext cx="3924148" cy="1485900"/>
-          </a:xfrm>
-          <a:prstGeom prst="rect">
-            <a:avLst/>
-          </a:prstGeom>
-          <a:noFill/>
-          <a:ln/>
-        </p:spPr>
-        <p:txBody>
-          <a:bodyPr wrap="square" lIns="0" tIns="0" rIns="0" bIns="0" rtlCol="0" anchor="t"/>
-          <a:lstStyle/>
-          <a:p>
-            <a:pPr indent="0" marL="0">
-              <a:buNone/>
-            </a:pPr>
-            <a:r>
-              <a:rPr lang="en-US" sz="2000" dirty="0">
-                <a:solidFill>
-                  <a:srgbClr val="3C3828"/>
-                </a:solidFill>
-                <a:highlight>
-                  <a:srgbClr val="FFE14D"/>
-                </a:highlight>
-                <a:latin typeface="Calibri" pitchFamily="34" charset="0"/>
-                <a:ea typeface="Calibri" pitchFamily="34" charset="-122"/>
-                <a:cs typeface="Calibri" pitchFamily="34" charset="-120"/>
-              </a:rPr>
-              <a:t>Back at the door</a:t>
-            </a:r>
-            <a:r>
-              <a:rPr lang="en-US" sz="2000" dirty="0">
-                <a:solidFill>
-                  <a:srgbClr val="3C3828"/>
-                </a:solidFill>
-                <a:latin typeface="Calibri" pitchFamily="34" charset="0"/>
-                <a:ea typeface="Calibri" pitchFamily="34" charset="-122"/>
-                <a:cs typeface="Calibri" pitchFamily="34" charset="-120"/>
-              </a:rPr>
-              <a:t> · You step out, point at the neighborhood, and leave gracefully. That’s your conclusion.</a:t>
+              <a:t>Written one? Ask the Tutor for feedback</a:t>
             </a:r>
             <a:endParaRPr lang="en-US" sz="2000" dirty="0"/>
           </a:p>

--- a/services/web-app/resources/thesis-essay-decks/lesson-5-body-paragraphs.pptx
+++ b/services/web-app/resources/thesis-essay-decks/lesson-5-body-paragraphs.pptx
@@ -3871,7 +3871,7 @@
               <a:buNone/>
             </a:pPr>
             <a:r>
-              <a:rPr lang="en-US" sz="1300" b="1" spc="200" kern="0" dirty="0">
+              <a:rPr lang="en-US" sz="1300" b="1" dirty="0">
                 <a:solidFill>
                   <a:srgbClr val="02BDC7"/>
                 </a:solidFill>
@@ -3879,7 +3879,7 @@
                 <a:ea typeface="Consolas" pitchFamily="34" charset="-122"/>
                 <a:cs typeface="Consolas" pitchFamily="34" charset="-120"/>
               </a:rPr>
-              <a:t>THESIS-DRIVEN ESSAY · LESSON 5</a:t>
+              <a:t>Thesis-Driven Essay · Lesson 5</a:t>
             </a:r>
             <a:endParaRPr lang="en-US" sz="1300" dirty="0"/>
           </a:p>
@@ -4189,7 +4189,7 @@
               <a:buNone/>
             </a:pPr>
             <a:r>
-              <a:rPr lang="en-US" sz="1200" b="1" spc="200" kern="0" dirty="0">
+              <a:rPr lang="en-US" sz="1200" b="1" dirty="0">
                 <a:solidFill>
                   <a:srgbClr val="FC4067"/>
                 </a:solidFill>
@@ -4197,7 +4197,7 @@
                 <a:ea typeface="Consolas" pitchFamily="34" charset="-122"/>
                 <a:cs typeface="Consolas" pitchFamily="34" charset="-120"/>
               </a:rPr>
-              <a:t>REVIEW · 4 OF 5</a:t>
+              <a:t>Review · 4 of 5</a:t>
             </a:r>
             <a:endParaRPr lang="en-US" sz="1200" dirty="0"/>
           </a:p>
@@ -5016,7 +5016,7 @@
               <a:buNone/>
             </a:pPr>
             <a:r>
-              <a:rPr lang="en-US" sz="1200" b="1" spc="200" kern="0" dirty="0">
+              <a:rPr lang="en-US" sz="1200" b="1" dirty="0">
                 <a:solidFill>
                   <a:srgbClr val="02BDC7"/>
                 </a:solidFill>
@@ -5024,7 +5024,7 @@
                 <a:ea typeface="Consolas" pitchFamily="34" charset="-122"/>
                 <a:cs typeface="Consolas" pitchFamily="34" charset="-120"/>
               </a:rPr>
-              <a:t>REVIEW · 5 OF 5</a:t>
+              <a:t>Review · 5 of 5</a:t>
             </a:r>
             <a:endParaRPr lang="en-US" sz="1200" dirty="0"/>
           </a:p>
@@ -5737,7 +5737,7 @@
               <a:buNone/>
             </a:pPr>
             <a:r>
-              <a:rPr lang="en-US" sz="1200" b="1" spc="200" kern="0" dirty="0">
+              <a:rPr lang="en-US" sz="1200" b="1" dirty="0">
                 <a:solidFill>
                   <a:srgbClr val="FFB600"/>
                 </a:solidFill>
@@ -5745,7 +5745,7 @@
                 <a:ea typeface="Consolas" pitchFamily="34" charset="-122"/>
                 <a:cs typeface="Consolas" pitchFamily="34" charset="-120"/>
               </a:rPr>
-              <a:t>REVIEW · 5 OF 5</a:t>
+              <a:t>Review · 5 of 5</a:t>
             </a:r>
             <a:endParaRPr lang="en-US" sz="1200" dirty="0"/>
           </a:p>
@@ -6461,7 +6461,7 @@
               <a:buNone/>
             </a:pPr>
             <a:r>
-              <a:rPr lang="en-US" sz="1200" b="1" spc="200" kern="0" dirty="0">
+              <a:rPr lang="en-US" sz="1200" b="1" dirty="0">
                 <a:solidFill>
                   <a:srgbClr val="02BDC7"/>
                 </a:solidFill>
@@ -6469,7 +6469,7 @@
                 <a:ea typeface="Consolas" pitchFamily="34" charset="-122"/>
                 <a:cs typeface="Consolas" pitchFamily="34" charset="-120"/>
               </a:rPr>
-              <a:t>THE FORM</a:t>
+              <a:t>The form</a:t>
             </a:r>
             <a:endParaRPr lang="en-US" sz="1200" dirty="0"/>
           </a:p>
@@ -7962,7 +7962,7 @@
               <a:buNone/>
             </a:pPr>
             <a:r>
-              <a:rPr lang="en-US" sz="1200" b="1" spc="200" kern="0" dirty="0">
+              <a:rPr lang="en-US" sz="1200" b="1" dirty="0">
                 <a:solidFill>
                   <a:srgbClr val="02BDC7"/>
                 </a:solidFill>
@@ -7970,7 +7970,7 @@
                 <a:ea typeface="Consolas" pitchFamily="34" charset="-122"/>
                 <a:cs typeface="Consolas" pitchFamily="34" charset="-120"/>
               </a:rPr>
-              <a:t>THE RULE</a:t>
+              <a:t>The rule</a:t>
             </a:r>
             <a:endParaRPr lang="en-US" sz="1200" dirty="0"/>
           </a:p>
@@ -8279,7 +8279,7 @@
               <a:buNone/>
             </a:pPr>
             <a:r>
-              <a:rPr lang="en-US" sz="1200" b="1" spc="200" kern="0" dirty="0">
+              <a:rPr lang="en-US" sz="1200" b="1" dirty="0">
                 <a:solidFill>
                   <a:srgbClr val="FFB600"/>
                 </a:solidFill>
@@ -8287,7 +8287,7 @@
                 <a:ea typeface="Consolas" pitchFamily="34" charset="-122"/>
                 <a:cs typeface="Consolas" pitchFamily="34" charset="-120"/>
               </a:rPr>
-              <a:t>THE GOOD NEWS</a:t>
+              <a:t>The good news</a:t>
             </a:r>
             <a:endParaRPr lang="en-US" sz="1200" dirty="0"/>
           </a:p>
@@ -8585,7 +8585,7 @@
               <a:buNone/>
             </a:pPr>
             <a:r>
-              <a:rPr lang="en-US" sz="1200" b="1" spc="200" kern="0" dirty="0">
+              <a:rPr lang="en-US" sz="1200" b="1" dirty="0">
                 <a:solidFill>
                   <a:srgbClr val="02BDC7"/>
                 </a:solidFill>
@@ -8593,7 +8593,7 @@
                 <a:ea typeface="Consolas" pitchFamily="34" charset="-122"/>
                 <a:cs typeface="Consolas" pitchFamily="34" charset="-120"/>
               </a:rPr>
-              <a:t>THE SAMPLE ESSAY’S THESIS</a:t>
+              <a:t>The sample essay’s thesis</a:t>
             </a:r>
             <a:endParaRPr lang="en-US" sz="1200" dirty="0"/>
           </a:p>
@@ -8915,7 +8915,7 @@
               <a:buNone/>
             </a:pPr>
             <a:r>
-              <a:rPr lang="en-US" sz="1200" b="1" spc="200" kern="0" dirty="0">
+              <a:rPr lang="en-US" sz="1200" b="1" dirty="0">
                 <a:solidFill>
                   <a:srgbClr val="02BDC7"/>
                 </a:solidFill>
@@ -8923,7 +8923,7 @@
                 <a:ea typeface="Consolas" pitchFamily="34" charset="-122"/>
                 <a:cs typeface="Consolas" pitchFamily="34" charset="-120"/>
               </a:rPr>
-              <a:t>LET YOUR THESIS BE YOUR GUIDE</a:t>
+              <a:t>Let your thesis be your guide</a:t>
             </a:r>
             <a:endParaRPr lang="en-US" sz="1200" dirty="0"/>
           </a:p>
@@ -9614,7 +9614,7 @@
               <a:buNone/>
             </a:pPr>
             <a:r>
-              <a:rPr lang="en-US" sz="1200" b="1" spc="200" kern="0" dirty="0">
+              <a:rPr lang="en-US" sz="1200" b="1" dirty="0">
                 <a:solidFill>
                   <a:srgbClr val="02BDC7"/>
                 </a:solidFill>
@@ -9622,7 +9622,7 @@
                 <a:ea typeface="Consolas" pitchFamily="34" charset="-122"/>
                 <a:cs typeface="Consolas" pitchFamily="34" charset="-120"/>
               </a:rPr>
-              <a:t>LET YOUR THESIS BE YOUR GUIDE</a:t>
+              <a:t>Let your thesis be your guide</a:t>
             </a:r>
             <a:endParaRPr lang="en-US" sz="1200" dirty="0"/>
           </a:p>
@@ -10867,7 +10867,7 @@
               <a:buNone/>
             </a:pPr>
             <a:r>
-              <a:rPr lang="en-US" sz="1200" b="1" spc="200" kern="0" dirty="0">
+              <a:rPr lang="en-US" sz="1200" b="1" dirty="0">
                 <a:solidFill>
                   <a:srgbClr val="FF9755"/>
                 </a:solidFill>
@@ -10875,7 +10875,7 @@
                 <a:ea typeface="Consolas" pitchFamily="34" charset="-122"/>
                 <a:cs typeface="Consolas" pitchFamily="34" charset="-120"/>
               </a:rPr>
-              <a:t>BASIC STRUCTURE OF A BODY PARAGRAPH</a:t>
+              <a:t>Basic structure of a body paragraph</a:t>
             </a:r>
             <a:endParaRPr lang="en-US" sz="1200" dirty="0"/>
           </a:p>
@@ -12375,7 +12375,7 @@
               <a:buNone/>
             </a:pPr>
             <a:r>
-              <a:rPr lang="en-US" sz="1200" b="1" spc="200" kern="0" dirty="0">
+              <a:rPr lang="en-US" sz="1200" b="1" dirty="0">
                 <a:solidFill>
                   <a:srgbClr val="02BDC7"/>
                 </a:solidFill>
@@ -12383,7 +12383,7 @@
                 <a:ea typeface="Consolas" pitchFamily="34" charset="-122"/>
                 <a:cs typeface="Consolas" pitchFamily="34" charset="-120"/>
               </a:rPr>
-              <a:t>SAMPLE ESSAY</a:t>
+              <a:t>Sample essay</a:t>
             </a:r>
             <a:endParaRPr lang="en-US" sz="1200" dirty="0"/>
           </a:p>
@@ -12677,7 +12677,7 @@
               <a:buNone/>
             </a:pPr>
             <a:r>
-              <a:rPr lang="en-US" sz="1200" b="1" spc="200" kern="0" dirty="0">
+              <a:rPr lang="en-US" sz="1200" b="1" dirty="0">
                 <a:solidFill>
                   <a:srgbClr val="02BDC7"/>
                 </a:solidFill>
@@ -12685,7 +12685,7 @@
                 <a:ea typeface="Consolas" pitchFamily="34" charset="-122"/>
                 <a:cs typeface="Consolas" pitchFamily="34" charset="-120"/>
               </a:rPr>
-              <a:t>SAMPLE ESSAY</a:t>
+              <a:t>Sample essay</a:t>
             </a:r>
             <a:endParaRPr lang="en-US" sz="1200" dirty="0"/>
           </a:p>
@@ -12982,7 +12982,7 @@
               <a:buNone/>
             </a:pPr>
             <a:r>
-              <a:rPr lang="en-US" sz="1200" b="1" spc="200" kern="0" dirty="0">
+              <a:rPr lang="en-US" sz="1200" b="1" dirty="0">
                 <a:solidFill>
                   <a:srgbClr val="FFB600"/>
                 </a:solidFill>
@@ -12990,7 +12990,7 @@
                 <a:ea typeface="Consolas" pitchFamily="34" charset="-122"/>
                 <a:cs typeface="Consolas" pitchFamily="34" charset="-120"/>
               </a:rPr>
-              <a:t>SAMPLE ESSAY</a:t>
+              <a:t>Sample essay</a:t>
             </a:r>
             <a:endParaRPr lang="en-US" sz="1200" dirty="0"/>
           </a:p>
@@ -13287,7 +13287,7 @@
               <a:buNone/>
             </a:pPr>
             <a:r>
-              <a:rPr lang="en-US" sz="1200" b="1" spc="200" kern="0" dirty="0">
+              <a:rPr lang="en-US" sz="1200" b="1" dirty="0">
                 <a:solidFill>
                   <a:srgbClr val="FC4540"/>
                 </a:solidFill>
@@ -13295,7 +13295,7 @@
                 <a:ea typeface="Consolas" pitchFamily="34" charset="-122"/>
                 <a:cs typeface="Consolas" pitchFamily="34" charset="-120"/>
               </a:rPr>
-              <a:t>SAMPLE ESSAY</a:t>
+              <a:t>Sample essay</a:t>
             </a:r>
             <a:endParaRPr lang="en-US" sz="1200" dirty="0"/>
           </a:p>
@@ -13592,7 +13592,7 @@
               <a:buNone/>
             </a:pPr>
             <a:r>
-              <a:rPr lang="en-US" sz="1200" b="1" spc="200" kern="0" dirty="0">
+              <a:rPr lang="en-US" sz="1200" b="1" dirty="0">
                 <a:solidFill>
                   <a:srgbClr val="FF9755"/>
                 </a:solidFill>
@@ -13600,7 +13600,7 @@
                 <a:ea typeface="Consolas" pitchFamily="34" charset="-122"/>
                 <a:cs typeface="Consolas" pitchFamily="34" charset="-120"/>
               </a:rPr>
-              <a:t>THE HOUSE ANALOGY</a:t>
+              <a:t>The house analogy</a:t>
             </a:r>
             <a:endParaRPr lang="en-US" sz="1200" dirty="0"/>
           </a:p>
@@ -14546,7 +14546,7 @@
               <a:buNone/>
             </a:pPr>
             <a:r>
-              <a:rPr lang="en-US" sz="1200" b="1" spc="200" kern="0" dirty="0">
+              <a:rPr lang="en-US" sz="1200" b="1" dirty="0">
                 <a:solidFill>
                   <a:srgbClr val="FFB600"/>
                 </a:solidFill>
@@ -14554,7 +14554,7 @@
                 <a:ea typeface="Consolas" pitchFamily="34" charset="-122"/>
                 <a:cs typeface="Consolas" pitchFamily="34" charset="-120"/>
               </a:rPr>
-              <a:t>YOUR TURN</a:t>
+              <a:t>Your turn</a:t>
             </a:r>
             <a:endParaRPr lang="en-US" sz="1200" dirty="0"/>
           </a:p>
@@ -15994,7 +15994,7 @@
               <a:buNone/>
             </a:pPr>
             <a:r>
-              <a:rPr lang="en-US" sz="1200" b="1" spc="200" kern="0" dirty="0">
+              <a:rPr lang="en-US" sz="1200" b="1" dirty="0">
                 <a:solidFill>
                   <a:srgbClr val="FC4540"/>
                 </a:solidFill>
@@ -16002,7 +16002,7 @@
                 <a:ea typeface="Consolas" pitchFamily="34" charset="-122"/>
                 <a:cs typeface="Consolas" pitchFamily="34" charset="-120"/>
               </a:rPr>
-              <a:t>REVIEW · 1 OF 5</a:t>
+              <a:t>Review · 1 of 5</a:t>
             </a:r>
             <a:endParaRPr lang="en-US" sz="1200" dirty="0"/>
           </a:p>
@@ -16818,7 +16818,7 @@
               <a:buNone/>
             </a:pPr>
             <a:r>
-              <a:rPr lang="en-US" sz="1200" b="1" spc="200" kern="0" dirty="0">
+              <a:rPr lang="en-US" sz="1200" b="1" dirty="0">
                 <a:solidFill>
                   <a:srgbClr val="FF9755"/>
                 </a:solidFill>
@@ -16826,7 +16826,7 @@
                 <a:ea typeface="Consolas" pitchFamily="34" charset="-122"/>
                 <a:cs typeface="Consolas" pitchFamily="34" charset="-120"/>
               </a:rPr>
-              <a:t>REVIEW · 1 OF 5</a:t>
+              <a:t>Review · 1 of 5</a:t>
             </a:r>
             <a:endParaRPr lang="en-US" sz="1200" dirty="0"/>
           </a:p>
@@ -17645,7 +17645,7 @@
               <a:buNone/>
             </a:pPr>
             <a:r>
-              <a:rPr lang="en-US" sz="1200" b="1" spc="200" kern="0" dirty="0">
+              <a:rPr lang="en-US" sz="1200" b="1" dirty="0">
                 <a:solidFill>
                   <a:srgbClr val="FC4067"/>
                 </a:solidFill>
@@ -17653,7 +17653,7 @@
                 <a:ea typeface="Consolas" pitchFamily="34" charset="-122"/>
                 <a:cs typeface="Consolas" pitchFamily="34" charset="-120"/>
               </a:rPr>
-              <a:t>REVIEW · 2 OF 5</a:t>
+              <a:t>Review · 2 of 5</a:t>
             </a:r>
             <a:endParaRPr lang="en-US" sz="1200" dirty="0"/>
           </a:p>
@@ -18469,7 +18469,7 @@
               <a:buNone/>
             </a:pPr>
             <a:r>
-              <a:rPr lang="en-US" sz="1200" b="1" spc="200" kern="0" dirty="0">
+              <a:rPr lang="en-US" sz="1200" b="1" dirty="0">
                 <a:solidFill>
                   <a:srgbClr val="02BDC7"/>
                 </a:solidFill>
@@ -18477,7 +18477,7 @@
                 <a:ea typeface="Consolas" pitchFamily="34" charset="-122"/>
                 <a:cs typeface="Consolas" pitchFamily="34" charset="-120"/>
               </a:rPr>
-              <a:t>REVIEW · 2 OF 5</a:t>
+              <a:t>Review · 2 of 5</a:t>
             </a:r>
             <a:endParaRPr lang="en-US" sz="1200" dirty="0"/>
           </a:p>
@@ -19296,7 +19296,7 @@
               <a:buNone/>
             </a:pPr>
             <a:r>
-              <a:rPr lang="en-US" sz="1200" b="1" spc="200" kern="0" dirty="0">
+              <a:rPr lang="en-US" sz="1200" b="1" dirty="0">
                 <a:solidFill>
                   <a:srgbClr val="FFB600"/>
                 </a:solidFill>
@@ -19304,7 +19304,7 @@
                 <a:ea typeface="Consolas" pitchFamily="34" charset="-122"/>
                 <a:cs typeface="Consolas" pitchFamily="34" charset="-120"/>
               </a:rPr>
-              <a:t>REVIEW · 3 OF 5</a:t>
+              <a:t>Review · 3 of 5</a:t>
             </a:r>
             <a:endParaRPr lang="en-US" sz="1200" dirty="0"/>
           </a:p>
@@ -20120,7 +20120,7 @@
               <a:buNone/>
             </a:pPr>
             <a:r>
-              <a:rPr lang="en-US" sz="1200" b="1" spc="200" kern="0" dirty="0">
+              <a:rPr lang="en-US" sz="1200" b="1" dirty="0">
                 <a:solidFill>
                   <a:srgbClr val="FC4540"/>
                 </a:solidFill>
@@ -20128,7 +20128,7 @@
                 <a:ea typeface="Consolas" pitchFamily="34" charset="-122"/>
                 <a:cs typeface="Consolas" pitchFamily="34" charset="-120"/>
               </a:rPr>
-              <a:t>REVIEW · 3 OF 5</a:t>
+              <a:t>Review · 3 of 5</a:t>
             </a:r>
             <a:endParaRPr lang="en-US" sz="1200" dirty="0"/>
           </a:p>
@@ -20947,7 +20947,7 @@
               <a:buNone/>
             </a:pPr>
             <a:r>
-              <a:rPr lang="en-US" sz="1200" b="1" spc="200" kern="0" dirty="0">
+              <a:rPr lang="en-US" sz="1200" b="1" dirty="0">
                 <a:solidFill>
                   <a:srgbClr val="FF9755"/>
                 </a:solidFill>
@@ -20955,7 +20955,7 @@
                 <a:ea typeface="Consolas" pitchFamily="34" charset="-122"/>
                 <a:cs typeface="Consolas" pitchFamily="34" charset="-120"/>
               </a:rPr>
-              <a:t>REVIEW · 4 OF 5</a:t>
+              <a:t>Review · 4 of 5</a:t>
             </a:r>
             <a:endParaRPr lang="en-US" sz="1200" dirty="0"/>
           </a:p>
